--- a/presentation/Italian_NER_Presentation.pptx
+++ b/presentation/Italian_NER_Presentation.pptx
@@ -116,6 +116,270 @@
 </file>
 
 <file path=ppt/charts/chart1.xml><?xml version="1.0" encoding="utf-8"?>
+<c:chartSpace xmlns:c="http://schemas.openxmlformats.org/drawingml/2006/chart" xmlns:a="http://schemas.openxmlformats.org/drawingml/2006/main" xmlns:r="http://schemas.openxmlformats.org/officeDocument/2006/relationships">
+  <c:date1904 val="0"/>
+  <c:roundedCorners val="1"/>
+  <c:chart>
+    <c:autoTitleDeleted val="1"/>
+    <c:plotArea>
+      <c:layout/>
+      <c:barChart>
+        <c:barDir val="col"/>
+        <c:grouping val="clustered"/>
+        <c:varyColors val="0"/>
+        <c:ser>
+          <c:idx val="0"/>
+          <c:order val="0"/>
+          <c:tx>
+            <c:strRef>
+              <c:f>Sheet1!$B$1</c:f>
+              <c:strCache>
+                <c:ptCount val="1"/>
+                <c:pt idx="0">
+                  <c:v>Train</c:v>
+                </c:pt>
+              </c:strCache>
+            </c:strRef>
+          </c:tx>
+          <c:spPr>
+            <a:solidFill>
+              <a:srgbClr val="3E5C76"/>
+            </a:solidFill>
+            <a:effectLst/>
+          </c:spPr>
+          <c:invertIfNegative val="0"/>
+          <c:dLbls>
+            <c:numFmt formatCode="#,##0" sourceLinked="0"/>
+            <c:txPr>
+              <a:bodyPr/>
+              <a:lstStyle/>
+              <a:p>
+                <a:pPr>
+                  <a:defRPr b="0" i="0" strike="noStrike" sz="1200" u="none">
+                    <a:solidFill>
+                      <a:srgbClr val="2B2B2B"/>
+                    </a:solidFill>
+                    <a:latin typeface="Calibri"/>
+                  </a:defRPr>
+                </a:pPr>
+              </a:p>
+            </c:txPr>
+            <c:showLegendKey val="0"/>
+            <c:showVal val="1"/>
+            <c:showCatName val="0"/>
+            <c:showSerName val="0"/>
+            <c:showPercent val="0"/>
+            <c:showBubbleSize val="0"/>
+            <c:showLeaderLines val="0"/>
+          </c:dLbls>
+          <c:dPt>
+            <c:idx val="0"/>
+            <c:invertIfNegative val="0"/>
+            <c:bubble3D val="0"/>
+            <c:spPr>
+              <a:solidFill>
+                <a:srgbClr val="3E5C76"/>
+              </a:solidFill>
+              <a:effectLst/>
+            </c:spPr>
+          </c:dPt>
+          <c:dPt>
+            <c:idx val="1"/>
+            <c:invertIfNegative val="0"/>
+            <c:bubble3D val="0"/>
+            <c:spPr>
+              <a:solidFill>
+                <a:srgbClr val="3E5C76"/>
+              </a:solidFill>
+              <a:effectLst/>
+            </c:spPr>
+          </c:dPt>
+          <c:dPt>
+            <c:idx val="2"/>
+            <c:invertIfNegative val="0"/>
+            <c:bubble3D val="0"/>
+            <c:spPr>
+              <a:solidFill>
+                <a:srgbClr val="A8281C"/>
+              </a:solidFill>
+              <a:effectLst/>
+            </c:spPr>
+          </c:dPt>
+          <c:cat>
+            <c:multiLvlStrRef>
+              <c:f>Sheet1!$A$2:$A$4</c:f>
+              <c:multiLvlStrCache>
+                <c:ptCount val="3"/>
+                <c:lvl>
+                  <c:pt idx="0">
+                    <c:v>Wikinews</c:v>
+                  </c:pt>
+                  <c:pt idx="1">
+                    <c:v>Fiction</c:v>
+                  </c:pt>
+                  <c:pt idx="2">
+                    <c:v>ADG</c:v>
+                  </c:pt>
+                </c:lvl>
+              </c:multiLvlStrCache>
+            </c:multiLvlStrRef>
+          </c:cat>
+          <c:val>
+            <c:numRef>
+              <c:f>Sheet1!$B$2:$B$4</c:f>
+              <c:numCache>
+                <c:formatCode>General</c:formatCode>
+                <c:ptCount val="3"/>
+                <c:pt idx="0">
+                  <c:v>10912</c:v>
+                </c:pt>
+                <c:pt idx="1">
+                  <c:v>11423</c:v>
+                </c:pt>
+                <c:pt idx="2">
+                  <c:v>5147</c:v>
+                </c:pt>
+              </c:numCache>
+            </c:numRef>
+          </c:val>
+        </c:ser>
+        <c:dLbls>
+          <c:numFmt formatCode="#,##0" sourceLinked="0"/>
+          <c:txPr>
+            <a:bodyPr/>
+            <a:lstStyle/>
+            <a:p>
+              <a:pPr>
+                <a:defRPr b="0" i="0" strike="noStrike" sz="1200" u="none">
+                  <a:solidFill>
+                    <a:srgbClr val="2B2B2B"/>
+                  </a:solidFill>
+                  <a:latin typeface="Calibri"/>
+                </a:defRPr>
+              </a:pPr>
+            </a:p>
+          </c:txPr>
+          <c:showLegendKey val="0"/>
+          <c:showVal val="1"/>
+          <c:showCatName val="0"/>
+          <c:showSerName val="0"/>
+          <c:showPercent val="0"/>
+          <c:showBubbleSize val="0"/>
+          <c:showLeaderLines val="0"/>
+        </c:dLbls>
+        <c:gapWidth val="50"/>
+        <c:overlap val="0"/>
+        <c:axId val="2094734554"/>
+        <c:axId val="2094734552"/>
+        <c:axId val="2094734556"/>
+      </c:barChart>
+      <c:catAx>
+        <c:axId val="2094734554"/>
+        <c:scaling>
+          <c:orientation val="minMax"/>
+        </c:scaling>
+        <c:delete val="0"/>
+        <c:axPos val="b"/>
+        <c:numFmt formatCode="General" sourceLinked="1"/>
+        <c:majorTickMark val="out"/>
+        <c:minorTickMark val="none"/>
+        <c:tickLblPos val="low"/>
+        <c:spPr>
+          <a:ln w="12700" cap="flat">
+            <a:solidFill>
+              <a:srgbClr val="888888"/>
+            </a:solidFill>
+            <a:prstDash val="solid"/>
+            <a:round/>
+          </a:ln>
+        </c:spPr>
+        <c:txPr>
+          <a:bodyPr/>
+          <a:lstStyle/>
+          <a:p>
+            <a:pPr>
+              <a:defRPr sz="1300" b="0" i="0" u="none" strike="noStrike">
+                <a:solidFill>
+                  <a:srgbClr val="2B2B2B"/>
+                </a:solidFill>
+                <a:latin typeface="Calibri"/>
+              </a:defRPr>
+            </a:pPr>
+            <a:endParaRPr lang="en-US"/>
+          </a:p>
+        </c:txPr>
+        <c:crossAx val="2094734552"/>
+        <c:crosses val="autoZero"/>
+        <c:auto val="1"/>
+        <c:lblAlgn val="ctr"/>
+        <c:noMultiLvlLbl val="1"/>
+      </c:catAx>
+      <c:valAx>
+        <c:axId val="2094734552"/>
+        <c:scaling>
+          <c:orientation val="minMax"/>
+          <c:max val="13500"/>
+          <c:min val="0"/>
+        </c:scaling>
+        <c:delete val="1"/>
+        <c:axPos val="l"/>
+        <c:numFmt formatCode="General" sourceLinked="0"/>
+        <c:majorTickMark val="out"/>
+        <c:minorTickMark val="none"/>
+        <c:tickLblPos val="nextTo"/>
+        <c:spPr>
+          <a:ln w="12700" cap="flat">
+            <a:solidFill>
+              <a:srgbClr val="888888"/>
+            </a:solidFill>
+            <a:prstDash val="solid"/>
+            <a:round/>
+          </a:ln>
+        </c:spPr>
+        <c:txPr>
+          <a:bodyPr/>
+          <a:lstStyle/>
+          <a:p>
+            <a:pPr>
+              <a:defRPr sz="1200" b="0" i="0" u="none" strike="noStrike">
+                <a:solidFill>
+                  <a:srgbClr val="000000"/>
+                </a:solidFill>
+                <a:latin typeface="Arial"/>
+              </a:defRPr>
+            </a:pPr>
+            <a:endParaRPr lang="en-US"/>
+          </a:p>
+        </c:txPr>
+        <c:crossAx val="2094734554"/>
+        <c:crosses val="autoZero"/>
+        <c:crossBetween val="between"/>
+      </c:valAx>
+      <c:spPr>
+        <a:noFill/>
+        <a:ln>
+          <a:noFill/>
+        </a:ln>
+        <a:effectLst/>
+      </c:spPr>
+    </c:plotArea>
+    <c:plotVisOnly val="1"/>
+    <c:dispBlanksAs val="span"/>
+  </c:chart>
+  <c:spPr>
+    <a:noFill/>
+    <a:ln>
+      <a:noFill/>
+    </a:ln>
+    <a:effectLst/>
+  </c:spPr>
+  <c:externalData r:id="rId1">
+    <c:autoUpdate val="0"/>
+  </c:externalData>
+</c:chartSpace>
+</file>
+
+<file path=ppt/charts/chart2.xml><?xml version="1.0" encoding="utf-8"?>
 <c:chartSpace xmlns:c="http://schemas.openxmlformats.org/drawingml/2006/chart" xmlns:a="http://schemas.openxmlformats.org/drawingml/2006/main" xmlns:r="http://schemas.openxmlformats.org/officeDocument/2006/relationships">
   <c:date1904 val="0"/>
   <c:roundedCorners val="1"/>
@@ -460,7 +724,7 @@
 </c:chartSpace>
 </file>
 
-<file path=ppt/charts/chart2.xml><?xml version="1.0" encoding="utf-8"?>
+<file path=ppt/charts/chart3.xml><?xml version="1.0" encoding="utf-8"?>
 <c:chartSpace xmlns:c="http://schemas.openxmlformats.org/drawingml/2006/chart" xmlns:a="http://schemas.openxmlformats.org/drawingml/2006/main" xmlns:r="http://schemas.openxmlformats.org/officeDocument/2006/relationships">
   <c:date1904 val="0"/>
   <c:roundedCorners val="1"/>
@@ -1288,7 +1552,7 @@
           <a:p>
             <a:r>
               <a:rPr lang="en-US" dirty="0"/>
-              <a:t>NER = finding persons, organizations, locations in text. Core question: does a model pretrained only on Italian beat a multilingual one?</a:t>
+              <a:t>Main goal. Then explain NER with the example sentence: Pope Leo = person, hospital = organization, Rome = location.</a:t>
             </a:r>
             <a:endParaRPr lang="en-US" dirty="0"/>
           </a:p>
@@ -1376,7 +1640,7 @@
           <a:p>
             <a:r>
               <a:rPr lang="en-US" dirty="0"/>
-              <a:t>UmBERTo: Italian-only, RoBERTa-based, whole word masking. XLM-R: 100 languages. They differ in more than language: vocab, corpus, objective.</a:t>
+              <a:t>Quick word on Transformers: self-attention, all words at once. Then the two models. Stress: they differ in more than language.</a:t>
             </a:r>
             <a:endParaRPr lang="en-US" dirty="0"/>
           </a:p>
@@ -1464,7 +1728,7 @@
           <a:p>
             <a:r>
               <a:rPr lang="en-US" dirty="0"/>
-              <a:t>EVALITA 2023 shared task. Three domains, three entity types, BIO tagging. ADG is the smallest domain.</a:t>
+              <a:t>Three domains, but unbalanced: ADG has about half the training data. Then the BIO scheme with Pope Leo.</a:t>
             </a:r>
             <a:endParaRPr lang="en-US" dirty="0"/>
           </a:p>
@@ -1552,7 +1816,7 @@
           <a:p>
             <a:r>
               <a:rPr lang="en-US" dirty="0"/>
-              <a:t>Identical hyperparameters. XLM-R needed batch 1 x 8 gradient accumulation because of its big vocabulary; fp16 only for XLM-R. Model selected on dev F1.</a:t>
+              <a:t>Identical hyperparameters. XLM-R: batch 1 x 8 accumulation. Seqeval, entity-level. Why F1: accuracy is misleading because most tokens are O.</a:t>
             </a:r>
             <a:endParaRPr lang="en-US" dirty="0"/>
           </a:p>
@@ -2656,12 +2920,12 @@
         </p:nvSpPr>
         <p:spPr>
           <a:xfrm>
-            <a:off x="548640" y="1371600"/>
-            <a:ext cx="8046720" cy="1463040"/>
+            <a:off x="548640" y="1188720"/>
+            <a:ext cx="8046720" cy="1188720"/>
           </a:xfrm>
           <a:prstGeom prst="roundRect">
             <a:avLst>
-              <a:gd name="adj" fmla="val 6250"/>
+              <a:gd name="adj" fmla="val 7692"/>
             </a:avLst>
           </a:prstGeom>
           <a:solidFill>
@@ -2683,8 +2947,8 @@
         </p:nvSpPr>
         <p:spPr>
           <a:xfrm>
-            <a:off x="822960" y="1371600"/>
-            <a:ext cx="7498080" cy="1463040"/>
+            <a:off x="822960" y="1188720"/>
+            <a:ext cx="7498080" cy="1188720"/>
           </a:xfrm>
           <a:prstGeom prst="rect">
             <a:avLst/>
@@ -2700,7 +2964,7 @@
               <a:buNone/>
             </a:pPr>
             <a:r>
-              <a:rPr lang="en-US" sz="2600" i="1" dirty="0">
+              <a:rPr lang="en-US" sz="2400" i="1" dirty="0">
                 <a:solidFill>
                   <a:srgbClr val="A8281C"/>
                 </a:solidFill>
@@ -2708,25 +2972,189 @@
                 <a:ea typeface="Cambria" pitchFamily="34" charset="-122"/>
                 <a:cs typeface="Cambria" pitchFamily="34" charset="-120"/>
               </a:rPr>
-              <a:t>Does language-specific pretraining beat multilingual pretraining for Italian NER?</a:t>
-            </a:r>
-            <a:endParaRPr lang="en-US" sz="2600" dirty="0"/>
-          </a:p>
-        </p:txBody>
-      </p:sp>
-      <p:sp>
-        <p:nvSpPr>
-          <p:cNvPr id="6" name="Shape 3"/>
+              <a:t>Does an Italian-specific model beat a multilingual one for Italian NER?</a:t>
+            </a:r>
+            <a:endParaRPr lang="en-US" sz="2400" dirty="0"/>
+          </a:p>
+        </p:txBody>
+      </p:sp>
+      <p:sp>
+        <p:nvSpPr>
+          <p:cNvPr id="6" name="Text 3"/>
+          <p:cNvSpPr txBox="1"/>
+          <p:nvPr/>
+        </p:nvSpPr>
+        <p:spPr>
+          <a:xfrm>
+            <a:off x="548640" y="2606040"/>
+            <a:ext cx="3657600" cy="365760"/>
+          </a:xfrm>
+          <a:prstGeom prst="rect">
+            <a:avLst/>
+          </a:prstGeom>
+          <a:noFill/>
+          <a:ln/>
+        </p:spPr>
+        <p:txBody>
+          <a:bodyPr wrap="square" lIns="0" tIns="0" rIns="0" bIns="0" rtlCol="0" anchor="ctr"/>
+          <a:lstStyle/>
+          <a:p>
+            <a:pPr indent="0" marL="0">
+              <a:buNone/>
+            </a:pPr>
+            <a:r>
+              <a:rPr lang="en-US" sz="1400" b="1" dirty="0">
+                <a:solidFill>
+                  <a:srgbClr val="6B6B6B"/>
+                </a:solidFill>
+                <a:latin typeface="Calibri" pitchFamily="34" charset="0"/>
+                <a:ea typeface="Calibri" pitchFamily="34" charset="-122"/>
+                <a:cs typeface="Calibri" pitchFamily="34" charset="-120"/>
+              </a:rPr>
+              <a:t>What is NER?</a:t>
+            </a:r>
+            <a:endParaRPr lang="en-US" sz="1400" dirty="0"/>
+          </a:p>
+        </p:txBody>
+      </p:sp>
+      <p:sp>
+        <p:nvSpPr>
+          <p:cNvPr id="7" name="Text 4"/>
+          <p:cNvSpPr txBox="1"/>
+          <p:nvPr/>
+        </p:nvSpPr>
+        <p:spPr>
+          <a:xfrm>
+            <a:off x="548640" y="2971800"/>
+            <a:ext cx="8046720" cy="822960"/>
+          </a:xfrm>
+          <a:prstGeom prst="rect">
+            <a:avLst/>
+          </a:prstGeom>
+          <a:noFill/>
+          <a:ln/>
+        </p:spPr>
+        <p:txBody>
+          <a:bodyPr wrap="square" lIns="0" tIns="0" rIns="0" bIns="0" rtlCol="0" anchor="ctr"/>
+          <a:lstStyle/>
+          <a:p>
+            <a:pPr indent="0" marL="0">
+              <a:buNone/>
+            </a:pPr>
+            <a:r>
+              <a:rPr lang="en-US" sz="2200" dirty="0">
+                <a:solidFill>
+                  <a:srgbClr val="2B2B2B"/>
+                </a:solidFill>
+                <a:latin typeface="Calibri" pitchFamily="34" charset="0"/>
+                <a:ea typeface="Calibri" pitchFamily="34" charset="-122"/>
+                <a:cs typeface="Calibri" pitchFamily="34" charset="-120"/>
+              </a:rPr>
+              <a:t>The operation for </a:t>
+            </a:r>
+            <a:pPr indent="0" marL="0">
+              <a:buNone/>
+            </a:pPr>
+            <a:r>
+              <a:rPr lang="en-US" sz="2200" b="1" dirty="0">
+                <a:solidFill>
+                  <a:srgbClr val="A8281C"/>
+                </a:solidFill>
+                <a:latin typeface="Calibri" pitchFamily="34" charset="0"/>
+                <a:ea typeface="Calibri" pitchFamily="34" charset="-122"/>
+                <a:cs typeface="Calibri" pitchFamily="34" charset="-120"/>
+              </a:rPr>
+              <a:t>Pope Leo</a:t>
+            </a:r>
+            <a:pPr indent="0" marL="0">
+              <a:buNone/>
+            </a:pPr>
+            <a:r>
+              <a:rPr lang="en-US" sz="2200" dirty="0">
+                <a:solidFill>
+                  <a:srgbClr val="2B2B2B"/>
+                </a:solidFill>
+                <a:latin typeface="Calibri" pitchFamily="34" charset="0"/>
+                <a:ea typeface="Calibri" pitchFamily="34" charset="-122"/>
+                <a:cs typeface="Calibri" pitchFamily="34" charset="-120"/>
+              </a:rPr>
+              <a:t> will take place at the </a:t>
+            </a:r>
+            <a:pPr indent="0" marL="0">
+              <a:buNone/>
+            </a:pPr>
+            <a:r>
+              <a:rPr lang="en-US" sz="2200" b="1" dirty="0">
+                <a:solidFill>
+                  <a:srgbClr val="3E5C76"/>
+                </a:solidFill>
+                <a:latin typeface="Calibri" pitchFamily="34" charset="0"/>
+                <a:ea typeface="Calibri" pitchFamily="34" charset="-122"/>
+                <a:cs typeface="Calibri" pitchFamily="34" charset="-120"/>
+              </a:rPr>
+              <a:t>Agostino Gemelli Hospital</a:t>
+            </a:r>
+            <a:pPr indent="0" marL="0">
+              <a:buNone/>
+            </a:pPr>
+            <a:r>
+              <a:rPr lang="en-US" sz="2200" dirty="0">
+                <a:solidFill>
+                  <a:srgbClr val="2B2B2B"/>
+                </a:solidFill>
+                <a:latin typeface="Calibri" pitchFamily="34" charset="0"/>
+                <a:ea typeface="Calibri" pitchFamily="34" charset="-122"/>
+                <a:cs typeface="Calibri" pitchFamily="34" charset="-120"/>
+              </a:rPr>
+              <a:t> in </a:t>
+            </a:r>
+            <a:pPr indent="0" marL="0">
+              <a:buNone/>
+            </a:pPr>
+            <a:r>
+              <a:rPr lang="en-US" sz="2200" b="1" dirty="0">
+                <a:solidFill>
+                  <a:srgbClr val="2E7D5B"/>
+                </a:solidFill>
+                <a:latin typeface="Calibri" pitchFamily="34" charset="0"/>
+                <a:ea typeface="Calibri" pitchFamily="34" charset="-122"/>
+                <a:cs typeface="Calibri" pitchFamily="34" charset="-120"/>
+              </a:rPr>
+              <a:t>Rome</a:t>
+            </a:r>
+            <a:pPr indent="0" marL="0">
+              <a:buNone/>
+            </a:pPr>
+            <a:r>
+              <a:rPr lang="en-US" sz="2200" dirty="0">
+                <a:solidFill>
+                  <a:srgbClr val="2B2B2B"/>
+                </a:solidFill>
+                <a:latin typeface="Calibri" pitchFamily="34" charset="0"/>
+                <a:ea typeface="Calibri" pitchFamily="34" charset="-122"/>
+                <a:cs typeface="Calibri" pitchFamily="34" charset="-120"/>
+              </a:rPr>
+              <a:t>.</a:t>
+            </a:r>
+            <a:endParaRPr lang="en-US" sz="2200" dirty="0"/>
+          </a:p>
+        </p:txBody>
+      </p:sp>
+      <p:sp>
+        <p:nvSpPr>
+          <p:cNvPr id="8" name="Shape 5"/>
           <p:cNvSpPr/>
           <p:nvPr/>
         </p:nvSpPr>
         <p:spPr>
           <a:xfrm>
-            <a:off x="548640" y="3246120"/>
-            <a:ext cx="822960" cy="822960"/>
-          </a:xfrm>
-          <a:prstGeom prst="ellipse">
-            <a:avLst/>
+            <a:off x="548640" y="3977640"/>
+            <a:ext cx="2286000" cy="457200"/>
+          </a:xfrm>
+          <a:prstGeom prst="roundRect">
+            <a:avLst>
+              <a:gd name="adj" fmla="val 50000"/>
+            </a:avLst>
           </a:prstGeom>
           <a:solidFill>
             <a:srgbClr val="A8281C"/>
@@ -2741,14 +3169,14 @@
       </p:sp>
       <p:sp>
         <p:nvSpPr>
-          <p:cNvPr id="7" name="Text 4"/>
+          <p:cNvPr id="9" name="Text 6"/>
           <p:cNvSpPr txBox="1"/>
           <p:nvPr/>
         </p:nvSpPr>
         <p:spPr>
           <a:xfrm>
-            <a:off x="548640" y="3246120"/>
-            <a:ext cx="822960" cy="822960"/>
+            <a:off x="548640" y="3977640"/>
+            <a:ext cx="2286000" cy="457200"/>
           </a:xfrm>
           <a:prstGeom prst="rect">
             <a:avLst/>
@@ -2764,7 +3192,7 @@
               <a:buNone/>
             </a:pPr>
             <a:r>
-              <a:rPr lang="en-US" sz="1600" b="1" dirty="0">
+              <a:rPr lang="en-US" sz="1500" b="1" dirty="0">
                 <a:solidFill>
                   <a:srgbClr val="FFFFFF"/>
                 </a:solidFill>
@@ -2772,22 +3200,49 @@
                 <a:ea typeface="Calibri" pitchFamily="34" charset="-122"/>
                 <a:cs typeface="Calibri" pitchFamily="34" charset="-120"/>
               </a:rPr>
-              <a:t>PER</a:t>
-            </a:r>
-            <a:endParaRPr lang="en-US" sz="1600" dirty="0"/>
-          </a:p>
-        </p:txBody>
-      </p:sp>
-      <p:sp>
-        <p:nvSpPr>
-          <p:cNvPr id="8" name="Text 5"/>
+              <a:t>PER  Person</a:t>
+            </a:r>
+            <a:endParaRPr lang="en-US" sz="1500" dirty="0"/>
+          </a:p>
+        </p:txBody>
+      </p:sp>
+      <p:sp>
+        <p:nvSpPr>
+          <p:cNvPr id="10" name="Shape 7"/>
+          <p:cNvSpPr/>
+          <p:nvPr/>
+        </p:nvSpPr>
+        <p:spPr>
+          <a:xfrm>
+            <a:off x="3429000" y="3977640"/>
+            <a:ext cx="2286000" cy="457200"/>
+          </a:xfrm>
+          <a:prstGeom prst="roundRect">
+            <a:avLst>
+              <a:gd name="adj" fmla="val 50000"/>
+            </a:avLst>
+          </a:prstGeom>
+          <a:solidFill>
+            <a:srgbClr val="3E5C76"/>
+          </a:solidFill>
+          <a:ln w="12700">
+            <a:solidFill>
+              <a:srgbClr val="3E5C76"/>
+            </a:solidFill>
+            <a:prstDash val="solid"/>
+          </a:ln>
+        </p:spPr>
+      </p:sp>
+      <p:sp>
+        <p:nvSpPr>
+          <p:cNvPr id="11" name="Text 8"/>
           <p:cNvSpPr txBox="1"/>
           <p:nvPr/>
         </p:nvSpPr>
         <p:spPr>
           <a:xfrm>
-            <a:off x="1508760" y="3246120"/>
-            <a:ext cx="1691640" cy="822960"/>
+            <a:off x="3429000" y="3977640"/>
+            <a:ext cx="2286000" cy="457200"/>
           </a:xfrm>
           <a:prstGeom prst="rect">
             <a:avLst/>
@@ -2799,278 +3254,87 @@
           <a:bodyPr wrap="square" lIns="0" tIns="0" rIns="0" bIns="0" rtlCol="0" anchor="ctr"/>
           <a:lstStyle/>
           <a:p>
-            <a:pPr indent="0" marL="0">
+            <a:pPr algn="ctr" indent="0" marL="0">
               <a:buNone/>
             </a:pPr>
             <a:r>
-              <a:rPr lang="en-US" sz="1600" b="1" dirty="0">
-                <a:solidFill>
-                  <a:srgbClr val="2B2B2B"/>
+              <a:rPr lang="en-US" sz="1500" b="1" dirty="0">
+                <a:solidFill>
+                  <a:srgbClr val="FFFFFF"/>
                 </a:solidFill>
                 <a:latin typeface="Calibri" pitchFamily="34" charset="0"/>
                 <a:ea typeface="Calibri" pitchFamily="34" charset="-122"/>
                 <a:cs typeface="Calibri" pitchFamily="34" charset="-120"/>
               </a:rPr>
-              <a:t>Person</a:t>
-            </a:r>
-            <a:endParaRPr lang="en-US" sz="1600" dirty="0"/>
-          </a:p>
-          <a:p>
-            <a:pPr indent="0" marL="0">
+              <a:t>ORG  Organization</a:t>
+            </a:r>
+            <a:endParaRPr lang="en-US" sz="1500" dirty="0"/>
+          </a:p>
+        </p:txBody>
+      </p:sp>
+      <p:sp>
+        <p:nvSpPr>
+          <p:cNvPr id="12" name="Shape 9"/>
+          <p:cNvSpPr/>
+          <p:nvPr/>
+        </p:nvSpPr>
+        <p:spPr>
+          <a:xfrm>
+            <a:off x="6309360" y="3977640"/>
+            <a:ext cx="2286000" cy="457200"/>
+          </a:xfrm>
+          <a:prstGeom prst="roundRect">
+            <a:avLst>
+              <a:gd name="adj" fmla="val 50000"/>
+            </a:avLst>
+          </a:prstGeom>
+          <a:solidFill>
+            <a:srgbClr val="2E7D5B"/>
+          </a:solidFill>
+          <a:ln w="12700">
+            <a:solidFill>
+              <a:srgbClr val="2E7D5B"/>
+            </a:solidFill>
+            <a:prstDash val="solid"/>
+          </a:ln>
+        </p:spPr>
+      </p:sp>
+      <p:sp>
+        <p:nvSpPr>
+          <p:cNvPr id="13" name="Text 10"/>
+          <p:cNvSpPr txBox="1"/>
+          <p:nvPr/>
+        </p:nvSpPr>
+        <p:spPr>
+          <a:xfrm>
+            <a:off x="6309360" y="3977640"/>
+            <a:ext cx="2286000" cy="457200"/>
+          </a:xfrm>
+          <a:prstGeom prst="rect">
+            <a:avLst/>
+          </a:prstGeom>
+          <a:noFill/>
+          <a:ln/>
+        </p:spPr>
+        <p:txBody>
+          <a:bodyPr wrap="square" lIns="0" tIns="0" rIns="0" bIns="0" rtlCol="0" anchor="ctr"/>
+          <a:lstStyle/>
+          <a:p>
+            <a:pPr algn="ctr" indent="0" marL="0">
               <a:buNone/>
             </a:pPr>
             <a:r>
-              <a:rPr lang="en-US" sz="1300" dirty="0">
-                <a:solidFill>
-                  <a:srgbClr val="6B6B6B"/>
+              <a:rPr lang="en-US" sz="1500" b="1" dirty="0">
+                <a:solidFill>
+                  <a:srgbClr val="FFFFFF"/>
                 </a:solidFill>
                 <a:latin typeface="Calibri" pitchFamily="34" charset="0"/>
                 <a:ea typeface="Calibri" pitchFamily="34" charset="-122"/>
                 <a:cs typeface="Calibri" pitchFamily="34" charset="-120"/>
               </a:rPr>
-              <a:t>Pope Leo</a:t>
-            </a:r>
-            <a:endParaRPr lang="en-US" sz="1600" dirty="0"/>
-          </a:p>
-        </p:txBody>
-      </p:sp>
-      <p:sp>
-        <p:nvSpPr>
-          <p:cNvPr id="9" name="Shape 6"/>
-          <p:cNvSpPr/>
-          <p:nvPr/>
-        </p:nvSpPr>
-        <p:spPr>
-          <a:xfrm>
-            <a:off x="3291840" y="3246120"/>
-            <a:ext cx="822960" cy="822960"/>
-          </a:xfrm>
-          <a:prstGeom prst="ellipse">
-            <a:avLst/>
-          </a:prstGeom>
-          <a:solidFill>
-            <a:srgbClr val="A8281C"/>
-          </a:solidFill>
-          <a:ln w="12700">
-            <a:solidFill>
-              <a:srgbClr val="A8281C"/>
-            </a:solidFill>
-            <a:prstDash val="solid"/>
-          </a:ln>
-        </p:spPr>
-      </p:sp>
-      <p:sp>
-        <p:nvSpPr>
-          <p:cNvPr id="10" name="Text 7"/>
-          <p:cNvSpPr txBox="1"/>
-          <p:nvPr/>
-        </p:nvSpPr>
-        <p:spPr>
-          <a:xfrm>
-            <a:off x="3291840" y="3246120"/>
-            <a:ext cx="822960" cy="822960"/>
-          </a:xfrm>
-          <a:prstGeom prst="rect">
-            <a:avLst/>
-          </a:prstGeom>
-          <a:noFill/>
-          <a:ln/>
-        </p:spPr>
-        <p:txBody>
-          <a:bodyPr wrap="square" lIns="0" tIns="0" rIns="0" bIns="0" rtlCol="0" anchor="ctr"/>
-          <a:lstStyle/>
-          <a:p>
-            <a:pPr algn="ctr" indent="0" marL="0">
-              <a:buNone/>
-            </a:pPr>
-            <a:r>
-              <a:rPr lang="en-US" sz="1600" b="1" dirty="0">
-                <a:solidFill>
-                  <a:srgbClr val="FFFFFF"/>
-                </a:solidFill>
-                <a:latin typeface="Calibri" pitchFamily="34" charset="0"/>
-                <a:ea typeface="Calibri" pitchFamily="34" charset="-122"/>
-                <a:cs typeface="Calibri" pitchFamily="34" charset="-120"/>
-              </a:rPr>
-              <a:t>ORG</a:t>
-            </a:r>
-            <a:endParaRPr lang="en-US" sz="1600" dirty="0"/>
-          </a:p>
-        </p:txBody>
-      </p:sp>
-      <p:sp>
-        <p:nvSpPr>
-          <p:cNvPr id="11" name="Text 8"/>
-          <p:cNvSpPr txBox="1"/>
-          <p:nvPr/>
-        </p:nvSpPr>
-        <p:spPr>
-          <a:xfrm>
-            <a:off x="4251960" y="3246120"/>
-            <a:ext cx="1691640" cy="822960"/>
-          </a:xfrm>
-          <a:prstGeom prst="rect">
-            <a:avLst/>
-          </a:prstGeom>
-          <a:noFill/>
-          <a:ln/>
-        </p:spPr>
-        <p:txBody>
-          <a:bodyPr wrap="square" lIns="0" tIns="0" rIns="0" bIns="0" rtlCol="0" anchor="ctr"/>
-          <a:lstStyle/>
-          <a:p>
-            <a:pPr indent="0" marL="0">
-              <a:buNone/>
-            </a:pPr>
-            <a:r>
-              <a:rPr lang="en-US" sz="1600" b="1" dirty="0">
-                <a:solidFill>
-                  <a:srgbClr val="2B2B2B"/>
-                </a:solidFill>
-                <a:latin typeface="Calibri" pitchFamily="34" charset="0"/>
-                <a:ea typeface="Calibri" pitchFamily="34" charset="-122"/>
-                <a:cs typeface="Calibri" pitchFamily="34" charset="-120"/>
-              </a:rPr>
-              <a:t>Organization</a:t>
-            </a:r>
-            <a:endParaRPr lang="en-US" sz="1600" dirty="0"/>
-          </a:p>
-          <a:p>
-            <a:pPr indent="0" marL="0">
-              <a:buNone/>
-            </a:pPr>
-            <a:r>
-              <a:rPr lang="en-US" sz="1300" dirty="0">
-                <a:solidFill>
-                  <a:srgbClr val="6B6B6B"/>
-                </a:solidFill>
-                <a:latin typeface="Calibri" pitchFamily="34" charset="0"/>
-                <a:ea typeface="Calibri" pitchFamily="34" charset="-122"/>
-                <a:cs typeface="Calibri" pitchFamily="34" charset="-120"/>
-              </a:rPr>
-              <a:t>Agostino Gemelli Hospital</a:t>
-            </a:r>
-            <a:endParaRPr lang="en-US" sz="1600" dirty="0"/>
-          </a:p>
-        </p:txBody>
-      </p:sp>
-      <p:sp>
-        <p:nvSpPr>
-          <p:cNvPr id="12" name="Shape 9"/>
-          <p:cNvSpPr/>
-          <p:nvPr/>
-        </p:nvSpPr>
-        <p:spPr>
-          <a:xfrm>
-            <a:off x="6035040" y="3246120"/>
-            <a:ext cx="822960" cy="822960"/>
-          </a:xfrm>
-          <a:prstGeom prst="ellipse">
-            <a:avLst/>
-          </a:prstGeom>
-          <a:solidFill>
-            <a:srgbClr val="A8281C"/>
-          </a:solidFill>
-          <a:ln w="12700">
-            <a:solidFill>
-              <a:srgbClr val="A8281C"/>
-            </a:solidFill>
-            <a:prstDash val="solid"/>
-          </a:ln>
-        </p:spPr>
-      </p:sp>
-      <p:sp>
-        <p:nvSpPr>
-          <p:cNvPr id="13" name="Text 10"/>
-          <p:cNvSpPr txBox="1"/>
-          <p:nvPr/>
-        </p:nvSpPr>
-        <p:spPr>
-          <a:xfrm>
-            <a:off x="6035040" y="3246120"/>
-            <a:ext cx="822960" cy="822960"/>
-          </a:xfrm>
-          <a:prstGeom prst="rect">
-            <a:avLst/>
-          </a:prstGeom>
-          <a:noFill/>
-          <a:ln/>
-        </p:spPr>
-        <p:txBody>
-          <a:bodyPr wrap="square" lIns="0" tIns="0" rIns="0" bIns="0" rtlCol="0" anchor="ctr"/>
-          <a:lstStyle/>
-          <a:p>
-            <a:pPr algn="ctr" indent="0" marL="0">
-              <a:buNone/>
-            </a:pPr>
-            <a:r>
-              <a:rPr lang="en-US" sz="1600" b="1" dirty="0">
-                <a:solidFill>
-                  <a:srgbClr val="FFFFFF"/>
-                </a:solidFill>
-                <a:latin typeface="Calibri" pitchFamily="34" charset="0"/>
-                <a:ea typeface="Calibri" pitchFamily="34" charset="-122"/>
-                <a:cs typeface="Calibri" pitchFamily="34" charset="-120"/>
-              </a:rPr>
-              <a:t>LOC</a:t>
-            </a:r>
-            <a:endParaRPr lang="en-US" sz="1600" dirty="0"/>
-          </a:p>
-        </p:txBody>
-      </p:sp>
-      <p:sp>
-        <p:nvSpPr>
-          <p:cNvPr id="14" name="Text 11"/>
-          <p:cNvSpPr txBox="1"/>
-          <p:nvPr/>
-        </p:nvSpPr>
-        <p:spPr>
-          <a:xfrm>
-            <a:off x="6995160" y="3246120"/>
-            <a:ext cx="1691640" cy="822960"/>
-          </a:xfrm>
-          <a:prstGeom prst="rect">
-            <a:avLst/>
-          </a:prstGeom>
-          <a:noFill/>
-          <a:ln/>
-        </p:spPr>
-        <p:txBody>
-          <a:bodyPr wrap="square" lIns="0" tIns="0" rIns="0" bIns="0" rtlCol="0" anchor="ctr"/>
-          <a:lstStyle/>
-          <a:p>
-            <a:pPr indent="0" marL="0">
-              <a:buNone/>
-            </a:pPr>
-            <a:r>
-              <a:rPr lang="en-US" sz="1600" b="1" dirty="0">
-                <a:solidFill>
-                  <a:srgbClr val="2B2B2B"/>
-                </a:solidFill>
-                <a:latin typeface="Calibri" pitchFamily="34" charset="0"/>
-                <a:ea typeface="Calibri" pitchFamily="34" charset="-122"/>
-                <a:cs typeface="Calibri" pitchFamily="34" charset="-120"/>
-              </a:rPr>
-              <a:t>Location</a:t>
-            </a:r>
-            <a:endParaRPr lang="en-US" sz="1600" dirty="0"/>
-          </a:p>
-          <a:p>
-            <a:pPr indent="0" marL="0">
-              <a:buNone/>
-            </a:pPr>
-            <a:r>
-              <a:rPr lang="en-US" sz="1300" dirty="0">
-                <a:solidFill>
-                  <a:srgbClr val="6B6B6B"/>
-                </a:solidFill>
-                <a:latin typeface="Calibri" pitchFamily="34" charset="0"/>
-                <a:ea typeface="Calibri" pitchFamily="34" charset="-122"/>
-                <a:cs typeface="Calibri" pitchFamily="34" charset="-120"/>
-              </a:rPr>
-              <a:t>Rome</a:t>
-            </a:r>
-            <a:endParaRPr lang="en-US" sz="1600" dirty="0"/>
+              <a:t>LOC  Location</a:t>
+            </a:r>
+            <a:endParaRPr lang="en-US" sz="1500" dirty="0"/>
           </a:p>
         </p:txBody>
       </p:sp>
@@ -3196,8 +3460,72 @@
         </p:nvSpPr>
         <p:spPr>
           <a:xfrm>
-            <a:off x="548640" y="1280160"/>
-            <a:ext cx="3931920" cy="3291840"/>
+            <a:off x="548640" y="1143000"/>
+            <a:ext cx="8046720" cy="502920"/>
+          </a:xfrm>
+          <a:prstGeom prst="rect">
+            <a:avLst/>
+          </a:prstGeom>
+          <a:solidFill>
+            <a:srgbClr val="F3F1EF"/>
+          </a:solidFill>
+          <a:ln w="12700">
+            <a:solidFill>
+              <a:srgbClr val="F3F1EF"/>
+            </a:solidFill>
+            <a:prstDash val="solid"/>
+          </a:ln>
+        </p:spPr>
+      </p:sp>
+      <p:sp>
+        <p:nvSpPr>
+          <p:cNvPr id="5" name="Text 2"/>
+          <p:cNvSpPr txBox="1"/>
+          <p:nvPr/>
+        </p:nvSpPr>
+        <p:spPr>
+          <a:xfrm>
+            <a:off x="548640" y="1143000"/>
+            <a:ext cx="8046720" cy="502920"/>
+          </a:xfrm>
+          <a:prstGeom prst="rect">
+            <a:avLst/>
+          </a:prstGeom>
+          <a:noFill/>
+          <a:ln/>
+        </p:spPr>
+        <p:txBody>
+          <a:bodyPr wrap="square" lIns="0" tIns="0" rIns="0" bIns="0" rtlCol="0" anchor="ctr"/>
+          <a:lstStyle/>
+          <a:p>
+            <a:pPr algn="ctr" indent="0" marL="0">
+              <a:buNone/>
+            </a:pPr>
+            <a:r>
+              <a:rPr lang="en-US" sz="1500" i="1" dirty="0">
+                <a:solidFill>
+                  <a:srgbClr val="2B2B2B"/>
+                </a:solidFill>
+                <a:latin typeface="Calibri" pitchFamily="34" charset="0"/>
+                <a:ea typeface="Calibri" pitchFamily="34" charset="-122"/>
+                <a:cs typeface="Calibri" pitchFamily="34" charset="-120"/>
+              </a:rPr>
+              <a:t>Both are RoBERTa-based Transformers: self-attention looks at all the words at once</a:t>
+            </a:r>
+            <a:endParaRPr lang="en-US" sz="1500" dirty="0"/>
+          </a:p>
+        </p:txBody>
+      </p:sp>
+      <p:sp>
+        <p:nvSpPr>
+          <p:cNvPr id="6" name="Shape 3"/>
+          <p:cNvSpPr/>
+          <p:nvPr/>
+        </p:nvSpPr>
+        <p:spPr>
+          <a:xfrm>
+            <a:off x="548640" y="1828800"/>
+            <a:ext cx="3931920" cy="2788920"/>
           </a:xfrm>
           <a:prstGeom prst="rect">
             <a:avLst/>
@@ -3222,14 +3550,14 @@
       </p:sp>
       <p:sp>
         <p:nvSpPr>
-          <p:cNvPr id="5" name="Shape 2"/>
+          <p:cNvPr id="7" name="Shape 4"/>
           <p:cNvSpPr/>
           <p:nvPr/>
         </p:nvSpPr>
         <p:spPr>
           <a:xfrm>
-            <a:off x="548640" y="1280160"/>
-            <a:ext cx="3931920" cy="822960"/>
+            <a:off x="548640" y="1828800"/>
+            <a:ext cx="3931920" cy="731520"/>
           </a:xfrm>
           <a:prstGeom prst="rect">
             <a:avLst/>
@@ -3247,14 +3575,14 @@
       </p:sp>
       <p:sp>
         <p:nvSpPr>
-          <p:cNvPr id="6" name="Text 3"/>
+          <p:cNvPr id="8" name="Text 5"/>
           <p:cNvSpPr txBox="1"/>
           <p:nvPr/>
         </p:nvSpPr>
         <p:spPr>
           <a:xfrm>
-            <a:off x="822960" y="1280160"/>
-            <a:ext cx="3383280" cy="822960"/>
+            <a:off x="822960" y="1828800"/>
+            <a:ext cx="3383280" cy="731520"/>
           </a:xfrm>
           <a:prstGeom prst="rect">
             <a:avLst/>
@@ -3270,7 +3598,7 @@
               <a:buNone/>
             </a:pPr>
             <a:r>
-              <a:rPr lang="en-US" sz="2200" b="1" dirty="0">
+              <a:rPr lang="en-US" sz="2000" b="1" dirty="0">
                 <a:solidFill>
                   <a:srgbClr val="FFFFFF"/>
                 </a:solidFill>
@@ -3280,7 +3608,7 @@
               </a:rPr>
               <a:t>UmBERTo</a:t>
             </a:r>
-            <a:endParaRPr lang="en-US" sz="2200" dirty="0"/>
+            <a:endParaRPr lang="en-US" sz="2000" dirty="0"/>
           </a:p>
           <a:p>
             <a:pPr indent="0" marL="0">
@@ -3297,20 +3625,20 @@
               </a:rPr>
               <a:t>Italian-specific</a:t>
             </a:r>
-            <a:endParaRPr lang="en-US" sz="2200" dirty="0"/>
-          </a:p>
-        </p:txBody>
-      </p:sp>
-      <p:sp>
-        <p:nvSpPr>
-          <p:cNvPr id="7" name="Text 4"/>
+            <a:endParaRPr lang="en-US" sz="2000" dirty="0"/>
+          </a:p>
+        </p:txBody>
+      </p:sp>
+      <p:sp>
+        <p:nvSpPr>
+          <p:cNvPr id="9" name="Text 6"/>
           <p:cNvSpPr txBox="1"/>
           <p:nvPr/>
         </p:nvSpPr>
         <p:spPr>
           <a:xfrm>
-            <a:off x="822960" y="2286000"/>
-            <a:ext cx="1371600" cy="548640"/>
+            <a:off x="822960" y="2697480"/>
+            <a:ext cx="1371600" cy="502920"/>
           </a:xfrm>
           <a:prstGeom prst="rect">
             <a:avLst/>
@@ -3326,7 +3654,7 @@
               <a:buNone/>
             </a:pPr>
             <a:r>
-              <a:rPr lang="en-US" sz="2600" b="1" dirty="0">
+              <a:rPr lang="en-US" sz="2400" b="1" dirty="0">
                 <a:solidFill>
                   <a:srgbClr val="A8281C"/>
                 </a:solidFill>
@@ -3336,20 +3664,20 @@
               </a:rPr>
               <a:t>32k</a:t>
             </a:r>
-            <a:endParaRPr lang="en-US" sz="2600" dirty="0"/>
-          </a:p>
-        </p:txBody>
-      </p:sp>
-      <p:sp>
-        <p:nvSpPr>
-          <p:cNvPr id="8" name="Text 5"/>
+            <a:endParaRPr lang="en-US" sz="2400" dirty="0"/>
+          </a:p>
+        </p:txBody>
+      </p:sp>
+      <p:sp>
+        <p:nvSpPr>
+          <p:cNvPr id="10" name="Text 7"/>
           <p:cNvSpPr txBox="1"/>
           <p:nvPr/>
         </p:nvSpPr>
         <p:spPr>
           <a:xfrm>
-            <a:off x="2286000" y="2286000"/>
-            <a:ext cx="2011680" cy="548640"/>
+            <a:off x="2286000" y="2697480"/>
+            <a:ext cx="2011680" cy="502920"/>
           </a:xfrm>
           <a:prstGeom prst="rect">
             <a:avLst/>
@@ -3381,14 +3709,14 @@
       </p:sp>
       <p:sp>
         <p:nvSpPr>
-          <p:cNvPr id="9" name="Text 6"/>
+          <p:cNvPr id="11" name="Text 8"/>
           <p:cNvSpPr txBox="1"/>
           <p:nvPr/>
         </p:nvSpPr>
         <p:spPr>
           <a:xfrm>
-            <a:off x="822960" y="3017520"/>
-            <a:ext cx="1371600" cy="548640"/>
+            <a:off x="822960" y="3337560"/>
+            <a:ext cx="1371600" cy="502920"/>
           </a:xfrm>
           <a:prstGeom prst="rect">
             <a:avLst/>
@@ -3404,7 +3732,7 @@
               <a:buNone/>
             </a:pPr>
             <a:r>
-              <a:rPr lang="en-US" sz="2600" b="1" dirty="0">
+              <a:rPr lang="en-US" sz="2400" b="1" dirty="0">
                 <a:solidFill>
                   <a:srgbClr val="A8281C"/>
                 </a:solidFill>
@@ -3414,20 +3742,20 @@
               </a:rPr>
               <a:t>Italian</a:t>
             </a:r>
-            <a:endParaRPr lang="en-US" sz="2600" dirty="0"/>
-          </a:p>
-        </p:txBody>
-      </p:sp>
-      <p:sp>
-        <p:nvSpPr>
-          <p:cNvPr id="10" name="Text 7"/>
+            <a:endParaRPr lang="en-US" sz="2400" dirty="0"/>
+          </a:p>
+        </p:txBody>
+      </p:sp>
+      <p:sp>
+        <p:nvSpPr>
+          <p:cNvPr id="12" name="Text 9"/>
           <p:cNvSpPr txBox="1"/>
           <p:nvPr/>
         </p:nvSpPr>
         <p:spPr>
           <a:xfrm>
-            <a:off x="2286000" y="3017520"/>
-            <a:ext cx="2011680" cy="548640"/>
+            <a:off x="2286000" y="3337560"/>
+            <a:ext cx="2011680" cy="502920"/>
           </a:xfrm>
           <a:prstGeom prst="rect">
             <a:avLst/>
@@ -3459,14 +3787,14 @@
       </p:sp>
       <p:sp>
         <p:nvSpPr>
-          <p:cNvPr id="11" name="Text 8"/>
+          <p:cNvPr id="13" name="Text 10"/>
           <p:cNvSpPr txBox="1"/>
           <p:nvPr/>
         </p:nvSpPr>
         <p:spPr>
           <a:xfrm>
-            <a:off x="822960" y="3749040"/>
-            <a:ext cx="1371600" cy="548640"/>
+            <a:off x="822960" y="3977640"/>
+            <a:ext cx="1371600" cy="502920"/>
           </a:xfrm>
           <a:prstGeom prst="rect">
             <a:avLst/>
@@ -3482,7 +3810,7 @@
               <a:buNone/>
             </a:pPr>
             <a:r>
-              <a:rPr lang="en-US" sz="2600" b="1" dirty="0">
+              <a:rPr lang="en-US" sz="2400" b="1" dirty="0">
                 <a:solidFill>
                   <a:srgbClr val="A8281C"/>
                 </a:solidFill>
@@ -3492,20 +3820,20 @@
               </a:rPr>
               <a:t>WWM</a:t>
             </a:r>
-            <a:endParaRPr lang="en-US" sz="2600" dirty="0"/>
-          </a:p>
-        </p:txBody>
-      </p:sp>
-      <p:sp>
-        <p:nvSpPr>
-          <p:cNvPr id="12" name="Text 9"/>
+            <a:endParaRPr lang="en-US" sz="2400" dirty="0"/>
+          </a:p>
+        </p:txBody>
+      </p:sp>
+      <p:sp>
+        <p:nvSpPr>
+          <p:cNvPr id="14" name="Text 11"/>
           <p:cNvSpPr txBox="1"/>
           <p:nvPr/>
         </p:nvSpPr>
         <p:spPr>
           <a:xfrm>
-            <a:off x="2286000" y="3749040"/>
-            <a:ext cx="2011680" cy="548640"/>
+            <a:off x="2286000" y="3977640"/>
+            <a:ext cx="2011680" cy="502920"/>
           </a:xfrm>
           <a:prstGeom prst="rect">
             <a:avLst/>
@@ -3537,14 +3865,14 @@
       </p:sp>
       <p:sp>
         <p:nvSpPr>
-          <p:cNvPr id="13" name="Shape 10"/>
+          <p:cNvPr id="15" name="Shape 12"/>
           <p:cNvSpPr/>
           <p:nvPr/>
         </p:nvSpPr>
         <p:spPr>
           <a:xfrm>
-            <a:off x="4663440" y="1280160"/>
-            <a:ext cx="3931920" cy="3291840"/>
+            <a:off x="4663440" y="1828800"/>
+            <a:ext cx="3931920" cy="2788920"/>
           </a:xfrm>
           <a:prstGeom prst="rect">
             <a:avLst/>
@@ -3569,14 +3897,14 @@
       </p:sp>
       <p:sp>
         <p:nvSpPr>
-          <p:cNvPr id="14" name="Shape 11"/>
+          <p:cNvPr id="16" name="Shape 13"/>
           <p:cNvSpPr/>
           <p:nvPr/>
         </p:nvSpPr>
         <p:spPr>
           <a:xfrm>
-            <a:off x="4663440" y="1280160"/>
-            <a:ext cx="3931920" cy="822960"/>
+            <a:off x="4663440" y="1828800"/>
+            <a:ext cx="3931920" cy="731520"/>
           </a:xfrm>
           <a:prstGeom prst="rect">
             <a:avLst/>
@@ -3594,14 +3922,14 @@
       </p:sp>
       <p:sp>
         <p:nvSpPr>
-          <p:cNvPr id="15" name="Text 12"/>
+          <p:cNvPr id="17" name="Text 14"/>
           <p:cNvSpPr txBox="1"/>
           <p:nvPr/>
         </p:nvSpPr>
         <p:spPr>
           <a:xfrm>
-            <a:off x="4937760" y="1280160"/>
-            <a:ext cx="3383280" cy="822960"/>
+            <a:off x="4937760" y="1828800"/>
+            <a:ext cx="3383280" cy="731520"/>
           </a:xfrm>
           <a:prstGeom prst="rect">
             <a:avLst/>
@@ -3617,7 +3945,7 @@
               <a:buNone/>
             </a:pPr>
             <a:r>
-              <a:rPr lang="en-US" sz="2200" b="1" dirty="0">
+              <a:rPr lang="en-US" sz="2000" b="1" dirty="0">
                 <a:solidFill>
                   <a:srgbClr val="FFFFFF"/>
                 </a:solidFill>
@@ -3627,7 +3955,7 @@
               </a:rPr>
               <a:t>XLM-RoBERTa</a:t>
             </a:r>
-            <a:endParaRPr lang="en-US" sz="2200" dirty="0"/>
+            <a:endParaRPr lang="en-US" sz="2000" dirty="0"/>
           </a:p>
           <a:p>
             <a:pPr indent="0" marL="0">
@@ -3644,20 +3972,20 @@
               </a:rPr>
               <a:t>Multilingual</a:t>
             </a:r>
-            <a:endParaRPr lang="en-US" sz="2200" dirty="0"/>
-          </a:p>
-        </p:txBody>
-      </p:sp>
-      <p:sp>
-        <p:nvSpPr>
-          <p:cNvPr id="16" name="Text 13"/>
+            <a:endParaRPr lang="en-US" sz="2000" dirty="0"/>
+          </a:p>
+        </p:txBody>
+      </p:sp>
+      <p:sp>
+        <p:nvSpPr>
+          <p:cNvPr id="18" name="Text 15"/>
           <p:cNvSpPr txBox="1"/>
           <p:nvPr/>
         </p:nvSpPr>
         <p:spPr>
           <a:xfrm>
-            <a:off x="4937760" y="2286000"/>
-            <a:ext cx="1371600" cy="548640"/>
+            <a:off x="4937760" y="2697480"/>
+            <a:ext cx="1371600" cy="502920"/>
           </a:xfrm>
           <a:prstGeom prst="rect">
             <a:avLst/>
@@ -3673,7 +4001,7 @@
               <a:buNone/>
             </a:pPr>
             <a:r>
-              <a:rPr lang="en-US" sz="2600" b="1" dirty="0">
+              <a:rPr lang="en-US" sz="2400" b="1" dirty="0">
                 <a:solidFill>
                   <a:srgbClr val="3E5C76"/>
                 </a:solidFill>
@@ -3683,20 +4011,20 @@
               </a:rPr>
               <a:t>250k</a:t>
             </a:r>
-            <a:endParaRPr lang="en-US" sz="2600" dirty="0"/>
-          </a:p>
-        </p:txBody>
-      </p:sp>
-      <p:sp>
-        <p:nvSpPr>
-          <p:cNvPr id="17" name="Text 14"/>
+            <a:endParaRPr lang="en-US" sz="2400" dirty="0"/>
+          </a:p>
+        </p:txBody>
+      </p:sp>
+      <p:sp>
+        <p:nvSpPr>
+          <p:cNvPr id="19" name="Text 16"/>
           <p:cNvSpPr txBox="1"/>
           <p:nvPr/>
         </p:nvSpPr>
         <p:spPr>
           <a:xfrm>
-            <a:off x="6400800" y="2286000"/>
-            <a:ext cx="2011680" cy="548640"/>
+            <a:off x="6400800" y="2697480"/>
+            <a:ext cx="2011680" cy="502920"/>
           </a:xfrm>
           <a:prstGeom prst="rect">
             <a:avLst/>
@@ -3728,14 +4056,14 @@
       </p:sp>
       <p:sp>
         <p:nvSpPr>
-          <p:cNvPr id="18" name="Text 15"/>
+          <p:cNvPr id="20" name="Text 17"/>
           <p:cNvSpPr txBox="1"/>
           <p:nvPr/>
         </p:nvSpPr>
         <p:spPr>
           <a:xfrm>
-            <a:off x="4937760" y="3017520"/>
-            <a:ext cx="1371600" cy="548640"/>
+            <a:off x="4937760" y="3337560"/>
+            <a:ext cx="1371600" cy="502920"/>
           </a:xfrm>
           <a:prstGeom prst="rect">
             <a:avLst/>
@@ -3751,7 +4079,7 @@
               <a:buNone/>
             </a:pPr>
             <a:r>
-              <a:rPr lang="en-US" sz="2600" b="1" dirty="0">
+              <a:rPr lang="en-US" sz="2400" b="1" dirty="0">
                 <a:solidFill>
                   <a:srgbClr val="3E5C76"/>
                 </a:solidFill>
@@ -3761,20 +4089,20 @@
               </a:rPr>
               <a:t>100</a:t>
             </a:r>
-            <a:endParaRPr lang="en-US" sz="2600" dirty="0"/>
-          </a:p>
-        </p:txBody>
-      </p:sp>
-      <p:sp>
-        <p:nvSpPr>
-          <p:cNvPr id="19" name="Text 16"/>
+            <a:endParaRPr lang="en-US" sz="2400" dirty="0"/>
+          </a:p>
+        </p:txBody>
+      </p:sp>
+      <p:sp>
+        <p:nvSpPr>
+          <p:cNvPr id="21" name="Text 18"/>
           <p:cNvSpPr txBox="1"/>
           <p:nvPr/>
         </p:nvSpPr>
         <p:spPr>
           <a:xfrm>
-            <a:off x="6400800" y="3017520"/>
-            <a:ext cx="2011680" cy="548640"/>
+            <a:off x="6400800" y="3337560"/>
+            <a:ext cx="2011680" cy="502920"/>
           </a:xfrm>
           <a:prstGeom prst="rect">
             <a:avLst/>
@@ -3806,14 +4134,14 @@
       </p:sp>
       <p:sp>
         <p:nvSpPr>
-          <p:cNvPr id="20" name="Text 17"/>
+          <p:cNvPr id="22" name="Text 19"/>
           <p:cNvSpPr txBox="1"/>
           <p:nvPr/>
         </p:nvSpPr>
         <p:spPr>
           <a:xfrm>
-            <a:off x="4937760" y="3749040"/>
-            <a:ext cx="1371600" cy="548640"/>
+            <a:off x="4937760" y="3977640"/>
+            <a:ext cx="1371600" cy="502920"/>
           </a:xfrm>
           <a:prstGeom prst="rect">
             <a:avLst/>
@@ -3829,7 +4157,7 @@
               <a:buNone/>
             </a:pPr>
             <a:r>
-              <a:rPr lang="en-US" sz="2600" b="1" dirty="0">
+              <a:rPr lang="en-US" sz="2400" b="1" dirty="0">
                 <a:solidFill>
                   <a:srgbClr val="3E5C76"/>
                 </a:solidFill>
@@ -3839,20 +4167,20 @@
               </a:rPr>
               <a:t>MLM</a:t>
             </a:r>
-            <a:endParaRPr lang="en-US" sz="2600" dirty="0"/>
-          </a:p>
-        </p:txBody>
-      </p:sp>
-      <p:sp>
-        <p:nvSpPr>
-          <p:cNvPr id="21" name="Text 18"/>
+            <a:endParaRPr lang="en-US" sz="2400" dirty="0"/>
+          </a:p>
+        </p:txBody>
+      </p:sp>
+      <p:sp>
+        <p:nvSpPr>
+          <p:cNvPr id="23" name="Text 20"/>
           <p:cNvSpPr txBox="1"/>
           <p:nvPr/>
         </p:nvSpPr>
         <p:spPr>
           <a:xfrm>
-            <a:off x="6400800" y="3749040"/>
-            <a:ext cx="2011680" cy="548640"/>
+            <a:off x="6400800" y="3977640"/>
+            <a:ext cx="2011680" cy="502920"/>
           </a:xfrm>
           <a:prstGeom prst="rect">
             <a:avLst/>
@@ -3998,14 +4326,147 @@
       </p:sp>
       <p:sp>
         <p:nvSpPr>
-          <p:cNvPr id="4" name="Shape 1"/>
+          <p:cNvPr id="4" name="Text 1"/>
+          <p:cNvSpPr txBox="1"/>
+          <p:nvPr/>
+        </p:nvSpPr>
+        <p:spPr>
+          <a:xfrm>
+            <a:off x="548640" y="1188720"/>
+            <a:ext cx="4206240" cy="320040"/>
+          </a:xfrm>
+          <a:prstGeom prst="rect">
+            <a:avLst/>
+          </a:prstGeom>
+          <a:noFill/>
+          <a:ln/>
+        </p:spPr>
+        <p:txBody>
+          <a:bodyPr wrap="square" lIns="0" tIns="0" rIns="0" bIns="0" rtlCol="0" anchor="ctr"/>
+          <a:lstStyle/>
+          <a:p>
+            <a:pPr indent="0" marL="0">
+              <a:buNone/>
+            </a:pPr>
+            <a:r>
+              <a:rPr lang="en-US" sz="1400" b="1" dirty="0">
+                <a:solidFill>
+                  <a:srgbClr val="6B6B6B"/>
+                </a:solidFill>
+                <a:latin typeface="Calibri" pitchFamily="34" charset="0"/>
+                <a:ea typeface="Calibri" pitchFamily="34" charset="-122"/>
+                <a:cs typeface="Calibri" pitchFamily="34" charset="-120"/>
+              </a:rPr>
+              <a:t>Training examples per domain</a:t>
+            </a:r>
+            <a:endParaRPr lang="en-US" sz="1400" dirty="0"/>
+          </a:p>
+        </p:txBody>
+      </p:sp>
+      <p:graphicFrame>
+        <p:nvGraphicFramePr>
+          <p:cNvPr id="5" name="Chart 0" descr=""/>
+          <p:cNvGraphicFramePr/>
+          <p:nvPr/>
+        </p:nvGraphicFramePr>
+        <p:xfrm>
+          <a:off x="548640" y="1508760"/>
+          <a:ext cx="4206240" cy="2514600"/>
+        </p:xfrm>
+        <a:graphic xmlns:a="http://schemas.openxmlformats.org/drawingml/2006/main">
+          <a:graphicData uri="http://schemas.openxmlformats.org/drawingml/2006/chart">
+            <c:chart xmlns:c="http://schemas.openxmlformats.org/drawingml/2006/chart" r:id="rId1"/>
+          </a:graphicData>
+        </a:graphic>
+      </p:graphicFrame>
+      <p:sp>
+        <p:nvSpPr>
+          <p:cNvPr id="6" name="Text 2"/>
+          <p:cNvSpPr txBox="1"/>
+          <p:nvPr/>
+        </p:nvSpPr>
+        <p:spPr>
+          <a:xfrm>
+            <a:off x="548640" y="4023360"/>
+            <a:ext cx="4206240" cy="274320"/>
+          </a:xfrm>
+          <a:prstGeom prst="rect">
+            <a:avLst/>
+          </a:prstGeom>
+          <a:noFill/>
+          <a:ln/>
+        </p:spPr>
+        <p:txBody>
+          <a:bodyPr wrap="square" lIns="0" tIns="0" rIns="0" bIns="0" rtlCol="0" anchor="ctr"/>
+          <a:lstStyle/>
+          <a:p>
+            <a:pPr algn="ctr" indent="0" marL="0">
+              <a:buNone/>
+            </a:pPr>
+            <a:r>
+              <a:rPr lang="en-US" sz="1200" dirty="0">
+                <a:solidFill>
+                  <a:srgbClr val="6B6B6B"/>
+                </a:solidFill>
+                <a:latin typeface="Calibri" pitchFamily="34" charset="0"/>
+                <a:ea typeface="Calibri" pitchFamily="34" charset="-122"/>
+                <a:cs typeface="Calibri" pitchFamily="34" charset="-120"/>
+              </a:rPr>
+              <a:t>News  ·  Literature  ·  De Gasperi speeches</a:t>
+            </a:r>
+            <a:endParaRPr lang="en-US" sz="1200" dirty="0"/>
+          </a:p>
+        </p:txBody>
+      </p:sp>
+      <p:sp>
+        <p:nvSpPr>
+          <p:cNvPr id="7" name="Text 3"/>
+          <p:cNvSpPr txBox="1"/>
+          <p:nvPr/>
+        </p:nvSpPr>
+        <p:spPr>
+          <a:xfrm>
+            <a:off x="5120640" y="1188720"/>
+            <a:ext cx="3474720" cy="320040"/>
+          </a:xfrm>
+          <a:prstGeom prst="rect">
+            <a:avLst/>
+          </a:prstGeom>
+          <a:noFill/>
+          <a:ln/>
+        </p:spPr>
+        <p:txBody>
+          <a:bodyPr wrap="square" lIns="0" tIns="0" rIns="0" bIns="0" rtlCol="0" anchor="ctr"/>
+          <a:lstStyle/>
+          <a:p>
+            <a:pPr indent="0" marL="0">
+              <a:buNone/>
+            </a:pPr>
+            <a:r>
+              <a:rPr lang="en-US" sz="1400" b="1" dirty="0">
+                <a:solidFill>
+                  <a:srgbClr val="6B6B6B"/>
+                </a:solidFill>
+                <a:latin typeface="Calibri" pitchFamily="34" charset="0"/>
+                <a:ea typeface="Calibri" pitchFamily="34" charset="-122"/>
+                <a:cs typeface="Calibri" pitchFamily="34" charset="-120"/>
+              </a:rPr>
+              <a:t>BIO labels</a:t>
+            </a:r>
+            <a:endParaRPr lang="en-US" sz="1400" dirty="0"/>
+          </a:p>
+        </p:txBody>
+      </p:sp>
+      <p:sp>
+        <p:nvSpPr>
+          <p:cNvPr id="8" name="Shape 4"/>
           <p:cNvSpPr/>
           <p:nvPr/>
         </p:nvSpPr>
         <p:spPr>
           <a:xfrm>
-            <a:off x="548640" y="1371600"/>
-            <a:ext cx="2560320" cy="2194560"/>
+            <a:off x="5120640" y="1645920"/>
+            <a:ext cx="822960" cy="548640"/>
           </a:xfrm>
           <a:prstGeom prst="rect">
             <a:avLst/>
@@ -4023,14 +4484,14 @@
       </p:sp>
       <p:sp>
         <p:nvSpPr>
-          <p:cNvPr id="5" name="Text 2"/>
+          <p:cNvPr id="9" name="Text 5"/>
           <p:cNvSpPr txBox="1"/>
           <p:nvPr/>
         </p:nvSpPr>
         <p:spPr>
           <a:xfrm>
-            <a:off x="777240" y="1508760"/>
-            <a:ext cx="2103120" cy="411480"/>
+            <a:off x="5120640" y="1645920"/>
+            <a:ext cx="822960" cy="548640"/>
           </a:xfrm>
           <a:prstGeom prst="rect">
             <a:avLst/>
@@ -4042,73 +4503,59 @@
           <a:bodyPr wrap="square" lIns="0" tIns="0" rIns="0" bIns="0" rtlCol="0" anchor="ctr"/>
           <a:lstStyle/>
           <a:p>
-            <a:pPr indent="0" marL="0">
+            <a:pPr algn="ctr" indent="0" marL="0">
               <a:buNone/>
             </a:pPr>
             <a:r>
-              <a:rPr lang="en-US" sz="2000" b="1" dirty="0">
+              <a:rPr lang="en-US" sz="1400" dirty="0">
                 <a:solidFill>
                   <a:srgbClr val="2B2B2B"/>
-                </a:solidFill>
-                <a:latin typeface="Cambria" pitchFamily="34" charset="0"/>
-                <a:ea typeface="Cambria" pitchFamily="34" charset="-122"/>
-                <a:cs typeface="Cambria" pitchFamily="34" charset="-120"/>
-              </a:rPr>
-              <a:t>Wikinews</a:t>
-            </a:r>
-            <a:endParaRPr lang="en-US" sz="2000" dirty="0"/>
-          </a:p>
-        </p:txBody>
-      </p:sp>
-      <p:sp>
-        <p:nvSpPr>
-          <p:cNvPr id="6" name="Text 3"/>
-          <p:cNvSpPr txBox="1"/>
-          <p:nvPr/>
-        </p:nvSpPr>
-        <p:spPr>
-          <a:xfrm>
-            <a:off x="777240" y="1920240"/>
-            <a:ext cx="2103120" cy="320040"/>
-          </a:xfrm>
-          <a:prstGeom prst="rect">
-            <a:avLst/>
-          </a:prstGeom>
-          <a:noFill/>
-          <a:ln/>
-        </p:spPr>
-        <p:txBody>
-          <a:bodyPr wrap="square" lIns="0" tIns="0" rIns="0" bIns="0" rtlCol="0" anchor="ctr"/>
-          <a:lstStyle/>
-          <a:p>
-            <a:pPr indent="0" marL="0">
-              <a:buNone/>
-            </a:pPr>
-            <a:r>
-              <a:rPr lang="en-US" sz="1300" dirty="0">
-                <a:solidFill>
-                  <a:srgbClr val="6B6B6B"/>
                 </a:solidFill>
                 <a:latin typeface="Calibri" pitchFamily="34" charset="0"/>
                 <a:ea typeface="Calibri" pitchFamily="34" charset="-122"/>
                 <a:cs typeface="Calibri" pitchFamily="34" charset="-120"/>
               </a:rPr>
-              <a:t>News articles</a:t>
-            </a:r>
-            <a:endParaRPr lang="en-US" sz="1300" dirty="0"/>
-          </a:p>
-        </p:txBody>
-      </p:sp>
-      <p:sp>
-        <p:nvSpPr>
-          <p:cNvPr id="7" name="Text 4"/>
+              <a:t>Pope</a:t>
+            </a:r>
+            <a:endParaRPr lang="en-US" sz="1400" dirty="0"/>
+          </a:p>
+        </p:txBody>
+      </p:sp>
+      <p:sp>
+        <p:nvSpPr>
+          <p:cNvPr id="10" name="Shape 6"/>
+          <p:cNvSpPr/>
+          <p:nvPr/>
+        </p:nvSpPr>
+        <p:spPr>
+          <a:xfrm>
+            <a:off x="5120640" y="2240280"/>
+            <a:ext cx="822960" cy="457200"/>
+          </a:xfrm>
+          <a:prstGeom prst="rect">
+            <a:avLst/>
+          </a:prstGeom>
+          <a:solidFill>
+            <a:srgbClr val="A8281C"/>
+          </a:solidFill>
+          <a:ln w="12700">
+            <a:solidFill>
+              <a:srgbClr val="A8281C"/>
+            </a:solidFill>
+            <a:prstDash val="solid"/>
+          </a:ln>
+        </p:spPr>
+      </p:sp>
+      <p:sp>
+        <p:nvSpPr>
+          <p:cNvPr id="11" name="Text 7"/>
           <p:cNvSpPr txBox="1"/>
           <p:nvPr/>
         </p:nvSpPr>
         <p:spPr>
           <a:xfrm>
-            <a:off x="777240" y="2377440"/>
-            <a:ext cx="2103120" cy="640080"/>
+            <a:off x="5120640" y="2240280"/>
+            <a:ext cx="822960" cy="457200"/>
           </a:xfrm>
           <a:prstGeom prst="rect">
             <a:avLst/>
@@ -4120,73 +4567,34 @@
           <a:bodyPr wrap="square" lIns="0" tIns="0" rIns="0" bIns="0" rtlCol="0" anchor="ctr"/>
           <a:lstStyle/>
           <a:p>
-            <a:pPr indent="0" marL="0">
+            <a:pPr algn="ctr" indent="0" marL="0">
               <a:buNone/>
             </a:pPr>
             <a:r>
-              <a:rPr lang="en-US" sz="3800" b="1" dirty="0">
-                <a:solidFill>
-                  <a:srgbClr val="A8281C"/>
-                </a:solidFill>
-                <a:latin typeface="Cambria" pitchFamily="34" charset="0"/>
-                <a:ea typeface="Cambria" pitchFamily="34" charset="-122"/>
-                <a:cs typeface="Cambria" pitchFamily="34" charset="-120"/>
-              </a:rPr>
-              <a:t>10,912</a:t>
-            </a:r>
-            <a:endParaRPr lang="en-US" sz="3800" dirty="0"/>
-          </a:p>
-        </p:txBody>
-      </p:sp>
-      <p:sp>
-        <p:nvSpPr>
-          <p:cNvPr id="8" name="Text 5"/>
-          <p:cNvSpPr txBox="1"/>
-          <p:nvPr/>
-        </p:nvSpPr>
-        <p:spPr>
-          <a:xfrm>
-            <a:off x="777240" y="3017520"/>
-            <a:ext cx="2103120" cy="320040"/>
-          </a:xfrm>
-          <a:prstGeom prst="rect">
-            <a:avLst/>
-          </a:prstGeom>
-          <a:noFill/>
-          <a:ln/>
-        </p:spPr>
-        <p:txBody>
-          <a:bodyPr wrap="square" lIns="0" tIns="0" rIns="0" bIns="0" rtlCol="0" anchor="ctr"/>
-          <a:lstStyle/>
-          <a:p>
-            <a:pPr indent="0" marL="0">
-              <a:buNone/>
-            </a:pPr>
-            <a:r>
-              <a:rPr lang="en-US" sz="1200" dirty="0">
-                <a:solidFill>
-                  <a:srgbClr val="6B6B6B"/>
+              <a:rPr lang="en-US" sz="1300" b="1" dirty="0">
+                <a:solidFill>
+                  <a:srgbClr val="FFFFFF"/>
                 </a:solidFill>
                 <a:latin typeface="Calibri" pitchFamily="34" charset="0"/>
                 <a:ea typeface="Calibri" pitchFamily="34" charset="-122"/>
                 <a:cs typeface="Calibri" pitchFamily="34" charset="-120"/>
               </a:rPr>
-              <a:t>training examples</a:t>
-            </a:r>
-            <a:endParaRPr lang="en-US" sz="1200" dirty="0"/>
-          </a:p>
-        </p:txBody>
-      </p:sp>
-      <p:sp>
-        <p:nvSpPr>
-          <p:cNvPr id="9" name="Shape 6"/>
+              <a:t>B-PER</a:t>
+            </a:r>
+            <a:endParaRPr lang="en-US" sz="1300" dirty="0"/>
+          </a:p>
+        </p:txBody>
+      </p:sp>
+      <p:sp>
+        <p:nvSpPr>
+          <p:cNvPr id="12" name="Shape 8"/>
           <p:cNvSpPr/>
           <p:nvPr/>
         </p:nvSpPr>
         <p:spPr>
           <a:xfrm>
-            <a:off x="3291840" y="1371600"/>
-            <a:ext cx="2560320" cy="2194560"/>
+            <a:off x="6007608" y="1645920"/>
+            <a:ext cx="822960" cy="548640"/>
           </a:xfrm>
           <a:prstGeom prst="rect">
             <a:avLst/>
@@ -4204,14 +4612,14 @@
       </p:sp>
       <p:sp>
         <p:nvSpPr>
-          <p:cNvPr id="10" name="Text 7"/>
+          <p:cNvPr id="13" name="Text 9"/>
           <p:cNvSpPr txBox="1"/>
           <p:nvPr/>
         </p:nvSpPr>
         <p:spPr>
           <a:xfrm>
-            <a:off x="3520440" y="1508760"/>
-            <a:ext cx="2103120" cy="411480"/>
+            <a:off x="6007608" y="1645920"/>
+            <a:ext cx="822960" cy="548640"/>
           </a:xfrm>
           <a:prstGeom prst="rect">
             <a:avLst/>
@@ -4223,73 +4631,59 @@
           <a:bodyPr wrap="square" lIns="0" tIns="0" rIns="0" bIns="0" rtlCol="0" anchor="ctr"/>
           <a:lstStyle/>
           <a:p>
-            <a:pPr indent="0" marL="0">
+            <a:pPr algn="ctr" indent="0" marL="0">
               <a:buNone/>
             </a:pPr>
             <a:r>
-              <a:rPr lang="en-US" sz="2000" b="1" dirty="0">
+              <a:rPr lang="en-US" sz="1400" dirty="0">
                 <a:solidFill>
                   <a:srgbClr val="2B2B2B"/>
-                </a:solidFill>
-                <a:latin typeface="Cambria" pitchFamily="34" charset="0"/>
-                <a:ea typeface="Cambria" pitchFamily="34" charset="-122"/>
-                <a:cs typeface="Cambria" pitchFamily="34" charset="-120"/>
-              </a:rPr>
-              <a:t>Fiction</a:t>
-            </a:r>
-            <a:endParaRPr lang="en-US" sz="2000" dirty="0"/>
-          </a:p>
-        </p:txBody>
-      </p:sp>
-      <p:sp>
-        <p:nvSpPr>
-          <p:cNvPr id="11" name="Text 8"/>
-          <p:cNvSpPr txBox="1"/>
-          <p:nvPr/>
-        </p:nvSpPr>
-        <p:spPr>
-          <a:xfrm>
-            <a:off x="3520440" y="1920240"/>
-            <a:ext cx="2103120" cy="320040"/>
-          </a:xfrm>
-          <a:prstGeom prst="rect">
-            <a:avLst/>
-          </a:prstGeom>
-          <a:noFill/>
-          <a:ln/>
-        </p:spPr>
-        <p:txBody>
-          <a:bodyPr wrap="square" lIns="0" tIns="0" rIns="0" bIns="0" rtlCol="0" anchor="ctr"/>
-          <a:lstStyle/>
-          <a:p>
-            <a:pPr indent="0" marL="0">
-              <a:buNone/>
-            </a:pPr>
-            <a:r>
-              <a:rPr lang="en-US" sz="1300" dirty="0">
-                <a:solidFill>
-                  <a:srgbClr val="6B6B6B"/>
                 </a:solidFill>
                 <a:latin typeface="Calibri" pitchFamily="34" charset="0"/>
                 <a:ea typeface="Calibri" pitchFamily="34" charset="-122"/>
                 <a:cs typeface="Calibri" pitchFamily="34" charset="-120"/>
               </a:rPr>
-              <a:t>Literary excerpts</a:t>
-            </a:r>
-            <a:endParaRPr lang="en-US" sz="1300" dirty="0"/>
-          </a:p>
-        </p:txBody>
-      </p:sp>
-      <p:sp>
-        <p:nvSpPr>
-          <p:cNvPr id="12" name="Text 9"/>
+              <a:t>Leo</a:t>
+            </a:r>
+            <a:endParaRPr lang="en-US" sz="1400" dirty="0"/>
+          </a:p>
+        </p:txBody>
+      </p:sp>
+      <p:sp>
+        <p:nvSpPr>
+          <p:cNvPr id="14" name="Shape 10"/>
+          <p:cNvSpPr/>
+          <p:nvPr/>
+        </p:nvSpPr>
+        <p:spPr>
+          <a:xfrm>
+            <a:off x="6007608" y="2240280"/>
+            <a:ext cx="822960" cy="457200"/>
+          </a:xfrm>
+          <a:prstGeom prst="rect">
+            <a:avLst/>
+          </a:prstGeom>
+          <a:solidFill>
+            <a:srgbClr val="A8281C"/>
+          </a:solidFill>
+          <a:ln w="12700">
+            <a:solidFill>
+              <a:srgbClr val="A8281C"/>
+            </a:solidFill>
+            <a:prstDash val="solid"/>
+          </a:ln>
+        </p:spPr>
+      </p:sp>
+      <p:sp>
+        <p:nvSpPr>
+          <p:cNvPr id="15" name="Text 11"/>
           <p:cNvSpPr txBox="1"/>
           <p:nvPr/>
         </p:nvSpPr>
         <p:spPr>
           <a:xfrm>
-            <a:off x="3520440" y="2377440"/>
-            <a:ext cx="2103120" cy="640080"/>
+            <a:off x="6007608" y="2240280"/>
+            <a:ext cx="822960" cy="457200"/>
           </a:xfrm>
           <a:prstGeom prst="rect">
             <a:avLst/>
@@ -4301,73 +4695,34 @@
           <a:bodyPr wrap="square" lIns="0" tIns="0" rIns="0" bIns="0" rtlCol="0" anchor="ctr"/>
           <a:lstStyle/>
           <a:p>
-            <a:pPr indent="0" marL="0">
+            <a:pPr algn="ctr" indent="0" marL="0">
               <a:buNone/>
             </a:pPr>
             <a:r>
-              <a:rPr lang="en-US" sz="3800" b="1" dirty="0">
-                <a:solidFill>
-                  <a:srgbClr val="A8281C"/>
-                </a:solidFill>
-                <a:latin typeface="Cambria" pitchFamily="34" charset="0"/>
-                <a:ea typeface="Cambria" pitchFamily="34" charset="-122"/>
-                <a:cs typeface="Cambria" pitchFamily="34" charset="-120"/>
-              </a:rPr>
-              <a:t>11,423</a:t>
-            </a:r>
-            <a:endParaRPr lang="en-US" sz="3800" dirty="0"/>
-          </a:p>
-        </p:txBody>
-      </p:sp>
-      <p:sp>
-        <p:nvSpPr>
-          <p:cNvPr id="13" name="Text 10"/>
-          <p:cNvSpPr txBox="1"/>
-          <p:nvPr/>
-        </p:nvSpPr>
-        <p:spPr>
-          <a:xfrm>
-            <a:off x="3520440" y="3017520"/>
-            <a:ext cx="2103120" cy="320040"/>
-          </a:xfrm>
-          <a:prstGeom prst="rect">
-            <a:avLst/>
-          </a:prstGeom>
-          <a:noFill/>
-          <a:ln/>
-        </p:spPr>
-        <p:txBody>
-          <a:bodyPr wrap="square" lIns="0" tIns="0" rIns="0" bIns="0" rtlCol="0" anchor="ctr"/>
-          <a:lstStyle/>
-          <a:p>
-            <a:pPr indent="0" marL="0">
-              <a:buNone/>
-            </a:pPr>
-            <a:r>
-              <a:rPr lang="en-US" sz="1200" dirty="0">
-                <a:solidFill>
-                  <a:srgbClr val="6B6B6B"/>
+              <a:rPr lang="en-US" sz="1300" b="1" dirty="0">
+                <a:solidFill>
+                  <a:srgbClr val="FFFFFF"/>
                 </a:solidFill>
                 <a:latin typeface="Calibri" pitchFamily="34" charset="0"/>
                 <a:ea typeface="Calibri" pitchFamily="34" charset="-122"/>
                 <a:cs typeface="Calibri" pitchFamily="34" charset="-120"/>
               </a:rPr>
-              <a:t>training examples</a:t>
-            </a:r>
-            <a:endParaRPr lang="en-US" sz="1200" dirty="0"/>
-          </a:p>
-        </p:txBody>
-      </p:sp>
-      <p:sp>
-        <p:nvSpPr>
-          <p:cNvPr id="14" name="Shape 11"/>
+              <a:t>I-PER</a:t>
+            </a:r>
+            <a:endParaRPr lang="en-US" sz="1300" dirty="0"/>
+          </a:p>
+        </p:txBody>
+      </p:sp>
+      <p:sp>
+        <p:nvSpPr>
+          <p:cNvPr id="16" name="Shape 12"/>
           <p:cNvSpPr/>
           <p:nvPr/>
         </p:nvSpPr>
         <p:spPr>
           <a:xfrm>
-            <a:off x="6035040" y="1371600"/>
-            <a:ext cx="2560320" cy="2194560"/>
+            <a:off x="6894576" y="1645920"/>
+            <a:ext cx="822960" cy="548640"/>
           </a:xfrm>
           <a:prstGeom prst="rect">
             <a:avLst/>
@@ -4385,14 +4740,14 @@
       </p:sp>
       <p:sp>
         <p:nvSpPr>
-          <p:cNvPr id="15" name="Text 12"/>
+          <p:cNvPr id="17" name="Text 13"/>
           <p:cNvSpPr txBox="1"/>
           <p:nvPr/>
         </p:nvSpPr>
         <p:spPr>
           <a:xfrm>
-            <a:off x="6263640" y="1508760"/>
-            <a:ext cx="2103120" cy="411480"/>
+            <a:off x="6894576" y="1645920"/>
+            <a:ext cx="822960" cy="548640"/>
           </a:xfrm>
           <a:prstGeom prst="rect">
             <a:avLst/>
@@ -4404,73 +4759,59 @@
           <a:bodyPr wrap="square" lIns="0" tIns="0" rIns="0" bIns="0" rtlCol="0" anchor="ctr"/>
           <a:lstStyle/>
           <a:p>
-            <a:pPr indent="0" marL="0">
+            <a:pPr algn="ctr" indent="0" marL="0">
               <a:buNone/>
             </a:pPr>
             <a:r>
-              <a:rPr lang="en-US" sz="2000" b="1" dirty="0">
+              <a:rPr lang="en-US" sz="1400" dirty="0">
                 <a:solidFill>
                   <a:srgbClr val="2B2B2B"/>
-                </a:solidFill>
-                <a:latin typeface="Cambria" pitchFamily="34" charset="0"/>
-                <a:ea typeface="Cambria" pitchFamily="34" charset="-122"/>
-                <a:cs typeface="Cambria" pitchFamily="34" charset="-120"/>
-              </a:rPr>
-              <a:t>ADG</a:t>
-            </a:r>
-            <a:endParaRPr lang="en-US" sz="2000" dirty="0"/>
-          </a:p>
-        </p:txBody>
-      </p:sp>
-      <p:sp>
-        <p:nvSpPr>
-          <p:cNvPr id="16" name="Text 13"/>
-          <p:cNvSpPr txBox="1"/>
-          <p:nvPr/>
-        </p:nvSpPr>
-        <p:spPr>
-          <a:xfrm>
-            <a:off x="6263640" y="1920240"/>
-            <a:ext cx="2103120" cy="320040"/>
-          </a:xfrm>
-          <a:prstGeom prst="rect">
-            <a:avLst/>
-          </a:prstGeom>
-          <a:noFill/>
-          <a:ln/>
-        </p:spPr>
-        <p:txBody>
-          <a:bodyPr wrap="square" lIns="0" tIns="0" rIns="0" bIns="0" rtlCol="0" anchor="ctr"/>
-          <a:lstStyle/>
-          <a:p>
-            <a:pPr indent="0" marL="0">
-              <a:buNone/>
-            </a:pPr>
-            <a:r>
-              <a:rPr lang="en-US" sz="1300" dirty="0">
-                <a:solidFill>
-                  <a:srgbClr val="6B6B6B"/>
                 </a:solidFill>
                 <a:latin typeface="Calibri" pitchFamily="34" charset="0"/>
                 <a:ea typeface="Calibri" pitchFamily="34" charset="-122"/>
                 <a:cs typeface="Calibri" pitchFamily="34" charset="-120"/>
               </a:rPr>
-              <a:t>De Gasperi speeches</a:t>
-            </a:r>
-            <a:endParaRPr lang="en-US" sz="1300" dirty="0"/>
-          </a:p>
-        </p:txBody>
-      </p:sp>
-      <p:sp>
-        <p:nvSpPr>
-          <p:cNvPr id="17" name="Text 14"/>
+              <a:t>visited</a:t>
+            </a:r>
+            <a:endParaRPr lang="en-US" sz="1400" dirty="0"/>
+          </a:p>
+        </p:txBody>
+      </p:sp>
+      <p:sp>
+        <p:nvSpPr>
+          <p:cNvPr id="18" name="Shape 14"/>
+          <p:cNvSpPr/>
+          <p:nvPr/>
+        </p:nvSpPr>
+        <p:spPr>
+          <a:xfrm>
+            <a:off x="6894576" y="2240280"/>
+            <a:ext cx="822960" cy="457200"/>
+          </a:xfrm>
+          <a:prstGeom prst="rect">
+            <a:avLst/>
+          </a:prstGeom>
+          <a:solidFill>
+            <a:srgbClr val="6B6B6B"/>
+          </a:solidFill>
+          <a:ln w="12700">
+            <a:solidFill>
+              <a:srgbClr val="6B6B6B"/>
+            </a:solidFill>
+            <a:prstDash val="solid"/>
+          </a:ln>
+        </p:spPr>
+      </p:sp>
+      <p:sp>
+        <p:nvSpPr>
+          <p:cNvPr id="19" name="Text 15"/>
           <p:cNvSpPr txBox="1"/>
           <p:nvPr/>
         </p:nvSpPr>
         <p:spPr>
           <a:xfrm>
-            <a:off x="6263640" y="2377440"/>
-            <a:ext cx="2103120" cy="640080"/>
+            <a:off x="6894576" y="2240280"/>
+            <a:ext cx="822960" cy="457200"/>
           </a:xfrm>
           <a:prstGeom prst="rect">
             <a:avLst/>
@@ -4482,73 +4823,59 @@
           <a:bodyPr wrap="square" lIns="0" tIns="0" rIns="0" bIns="0" rtlCol="0" anchor="ctr"/>
           <a:lstStyle/>
           <a:p>
-            <a:pPr indent="0" marL="0">
+            <a:pPr algn="ctr" indent="0" marL="0">
               <a:buNone/>
             </a:pPr>
             <a:r>
-              <a:rPr lang="en-US" sz="3800" b="1" dirty="0">
-                <a:solidFill>
-                  <a:srgbClr val="A8281C"/>
-                </a:solidFill>
-                <a:latin typeface="Cambria" pitchFamily="34" charset="0"/>
-                <a:ea typeface="Cambria" pitchFamily="34" charset="-122"/>
-                <a:cs typeface="Cambria" pitchFamily="34" charset="-120"/>
-              </a:rPr>
-              <a:t>5,147</a:t>
-            </a:r>
-            <a:endParaRPr lang="en-US" sz="3800" dirty="0"/>
-          </a:p>
-        </p:txBody>
-      </p:sp>
-      <p:sp>
-        <p:nvSpPr>
-          <p:cNvPr id="18" name="Text 15"/>
-          <p:cNvSpPr txBox="1"/>
-          <p:nvPr/>
-        </p:nvSpPr>
-        <p:spPr>
-          <a:xfrm>
-            <a:off x="6263640" y="3017520"/>
-            <a:ext cx="2103120" cy="320040"/>
-          </a:xfrm>
-          <a:prstGeom prst="rect">
-            <a:avLst/>
-          </a:prstGeom>
-          <a:noFill/>
-          <a:ln/>
-        </p:spPr>
-        <p:txBody>
-          <a:bodyPr wrap="square" lIns="0" tIns="0" rIns="0" bIns="0" rtlCol="0" anchor="ctr"/>
-          <a:lstStyle/>
-          <a:p>
-            <a:pPr indent="0" marL="0">
-              <a:buNone/>
-            </a:pPr>
-            <a:r>
-              <a:rPr lang="en-US" sz="1200" dirty="0">
-                <a:solidFill>
-                  <a:srgbClr val="6B6B6B"/>
+              <a:rPr lang="en-US" sz="1300" b="1" dirty="0">
+                <a:solidFill>
+                  <a:srgbClr val="FFFFFF"/>
                 </a:solidFill>
                 <a:latin typeface="Calibri" pitchFamily="34" charset="0"/>
                 <a:ea typeface="Calibri" pitchFamily="34" charset="-122"/>
                 <a:cs typeface="Calibri" pitchFamily="34" charset="-120"/>
               </a:rPr>
-              <a:t>training examples</a:t>
-            </a:r>
-            <a:endParaRPr lang="en-US" sz="1200" dirty="0"/>
-          </a:p>
-        </p:txBody>
-      </p:sp>
-      <p:sp>
-        <p:nvSpPr>
-          <p:cNvPr id="19" name="Text 16"/>
+              <a:t>O</a:t>
+            </a:r>
+            <a:endParaRPr lang="en-US" sz="1300" dirty="0"/>
+          </a:p>
+        </p:txBody>
+      </p:sp>
+      <p:sp>
+        <p:nvSpPr>
+          <p:cNvPr id="20" name="Shape 16"/>
+          <p:cNvSpPr/>
+          <p:nvPr/>
+        </p:nvSpPr>
+        <p:spPr>
+          <a:xfrm>
+            <a:off x="7781544" y="1645920"/>
+            <a:ext cx="822960" cy="548640"/>
+          </a:xfrm>
+          <a:prstGeom prst="rect">
+            <a:avLst/>
+          </a:prstGeom>
+          <a:solidFill>
+            <a:srgbClr val="F3F1EF"/>
+          </a:solidFill>
+          <a:ln w="12700">
+            <a:solidFill>
+              <a:srgbClr val="F3F1EF"/>
+            </a:solidFill>
+            <a:prstDash val="solid"/>
+          </a:ln>
+        </p:spPr>
+      </p:sp>
+      <p:sp>
+        <p:nvSpPr>
+          <p:cNvPr id="21" name="Text 17"/>
           <p:cNvSpPr txBox="1"/>
           <p:nvPr/>
         </p:nvSpPr>
         <p:spPr>
           <a:xfrm>
-            <a:off x="548640" y="3886200"/>
-            <a:ext cx="8046720" cy="457200"/>
+            <a:off x="7781544" y="1645920"/>
+            <a:ext cx="822960" cy="548640"/>
           </a:xfrm>
           <a:prstGeom prst="rect">
             <a:avLst/>
@@ -4560,11 +4887,11 @@
           <a:bodyPr wrap="square" lIns="0" tIns="0" rIns="0" bIns="0" rtlCol="0" anchor="ctr"/>
           <a:lstStyle/>
           <a:p>
-            <a:pPr indent="0" marL="0">
+            <a:pPr algn="ctr" indent="0" marL="0">
               <a:buNone/>
             </a:pPr>
             <a:r>
-              <a:rPr lang="en-US" sz="1500" b="1" dirty="0">
+              <a:rPr lang="en-US" sz="1400" dirty="0">
                 <a:solidFill>
                   <a:srgbClr val="2B2B2B"/>
                 </a:solidFill>
@@ -4572,23 +4899,222 @@
                 <a:ea typeface="Calibri" pitchFamily="34" charset="-122"/>
                 <a:cs typeface="Calibri" pitchFamily="34" charset="-120"/>
               </a:rPr>
-              <a:t>27,482 train  ·  4,767 dev  ·  4,126 test</a:t>
-            </a:r>
-            <a:pPr indent="0" marL="0">
+              <a:t>Rome</a:t>
+            </a:r>
+            <a:endParaRPr lang="en-US" sz="1400" dirty="0"/>
+          </a:p>
+        </p:txBody>
+      </p:sp>
+      <p:sp>
+        <p:nvSpPr>
+          <p:cNvPr id="22" name="Shape 18"/>
+          <p:cNvSpPr/>
+          <p:nvPr/>
+        </p:nvSpPr>
+        <p:spPr>
+          <a:xfrm>
+            <a:off x="7781544" y="2240280"/>
+            <a:ext cx="822960" cy="457200"/>
+          </a:xfrm>
+          <a:prstGeom prst="rect">
+            <a:avLst/>
+          </a:prstGeom>
+          <a:solidFill>
+            <a:srgbClr val="2E7D5B"/>
+          </a:solidFill>
+          <a:ln w="12700">
+            <a:solidFill>
+              <a:srgbClr val="2E7D5B"/>
+            </a:solidFill>
+            <a:prstDash val="solid"/>
+          </a:ln>
+        </p:spPr>
+      </p:sp>
+      <p:sp>
+        <p:nvSpPr>
+          <p:cNvPr id="23" name="Text 19"/>
+          <p:cNvSpPr txBox="1"/>
+          <p:nvPr/>
+        </p:nvSpPr>
+        <p:spPr>
+          <a:xfrm>
+            <a:off x="7781544" y="2240280"/>
+            <a:ext cx="822960" cy="457200"/>
+          </a:xfrm>
+          <a:prstGeom prst="rect">
+            <a:avLst/>
+          </a:prstGeom>
+          <a:noFill/>
+          <a:ln/>
+        </p:spPr>
+        <p:txBody>
+          <a:bodyPr wrap="square" lIns="0" tIns="0" rIns="0" bIns="0" rtlCol="0" anchor="ctr"/>
+          <a:lstStyle/>
+          <a:p>
+            <a:pPr algn="ctr" indent="0" marL="0">
               <a:buNone/>
             </a:pPr>
             <a:r>
-              <a:rPr lang="en-US" sz="1500" dirty="0">
-                <a:solidFill>
-                  <a:srgbClr val="6B6B6B"/>
+              <a:rPr lang="en-US" sz="1300" b="1" dirty="0">
+                <a:solidFill>
+                  <a:srgbClr val="FFFFFF"/>
                 </a:solidFill>
                 <a:latin typeface="Calibri" pitchFamily="34" charset="0"/>
                 <a:ea typeface="Calibri" pitchFamily="34" charset="-122"/>
                 <a:cs typeface="Calibri" pitchFamily="34" charset="-120"/>
               </a:rPr>
-              <a:t>     Tags: B-/I-  PER · ORG · LOC · O</a:t>
+              <a:t>B-LOC</a:t>
+            </a:r>
+            <a:endParaRPr lang="en-US" sz="1300" dirty="0"/>
+          </a:p>
+        </p:txBody>
+      </p:sp>
+      <p:sp>
+        <p:nvSpPr>
+          <p:cNvPr id="24" name="Text 20"/>
+          <p:cNvSpPr txBox="1"/>
+          <p:nvPr/>
+        </p:nvSpPr>
+        <p:spPr>
+          <a:xfrm>
+            <a:off x="5120640" y="2971800"/>
+            <a:ext cx="3474720" cy="1005840"/>
+          </a:xfrm>
+          <a:prstGeom prst="rect">
+            <a:avLst/>
+          </a:prstGeom>
+          <a:noFill/>
+          <a:ln/>
+        </p:spPr>
+        <p:txBody>
+          <a:bodyPr wrap="square" lIns="0" tIns="0" rIns="0" bIns="0" rtlCol="0" anchor="ctr"/>
+          <a:lstStyle/>
+          <a:p>
+            <a:pPr marL="342900" indent="-342900">
+              <a:spcAft>
+                <a:spcPts val="400"/>
+              </a:spcAft>
+              <a:buSzPct val="100000"/>
+              <a:buChar char="•"/>
+            </a:pPr>
+            <a:r>
+              <a:rPr lang="en-US" sz="1500" dirty="0">
+                <a:solidFill>
+                  <a:srgbClr val="2B2B2B"/>
+                </a:solidFill>
+                <a:latin typeface="Calibri" pitchFamily="34" charset="0"/>
+                <a:ea typeface="Calibri" pitchFamily="34" charset="-122"/>
+                <a:cs typeface="Calibri" pitchFamily="34" charset="-120"/>
+              </a:rPr>
+              <a:t>B = beginning of an entity</a:t>
             </a:r>
             <a:endParaRPr lang="en-US" sz="1500" dirty="0"/>
+          </a:p>
+          <a:p>
+            <a:pPr marL="342900" indent="-342900">
+              <a:spcAft>
+                <a:spcPts val="400"/>
+              </a:spcAft>
+              <a:buSzPct val="100000"/>
+              <a:buChar char="•"/>
+            </a:pPr>
+            <a:r>
+              <a:rPr lang="en-US" sz="1500" dirty="0">
+                <a:solidFill>
+                  <a:srgbClr val="2B2B2B"/>
+                </a:solidFill>
+                <a:latin typeface="Calibri" pitchFamily="34" charset="0"/>
+                <a:ea typeface="Calibri" pitchFamily="34" charset="-122"/>
+                <a:cs typeface="Calibri" pitchFamily="34" charset="-120"/>
+              </a:rPr>
+              <a:t>I = inside an entity</a:t>
+            </a:r>
+            <a:endParaRPr lang="en-US" sz="1500" dirty="0"/>
+          </a:p>
+          <a:p>
+            <a:pPr marL="342900" indent="-342900">
+              <a:spcAft>
+                <a:spcPts val="400"/>
+              </a:spcAft>
+              <a:buSzPct val="100000"/>
+              <a:buChar char="•"/>
+            </a:pPr>
+            <a:r>
+              <a:rPr lang="en-US" sz="1500" dirty="0">
+                <a:solidFill>
+                  <a:srgbClr val="2B2B2B"/>
+                </a:solidFill>
+                <a:latin typeface="Calibri" pitchFamily="34" charset="0"/>
+                <a:ea typeface="Calibri" pitchFamily="34" charset="-122"/>
+                <a:cs typeface="Calibri" pitchFamily="34" charset="-120"/>
+              </a:rPr>
+              <a:t>O = outside any entity</a:t>
+            </a:r>
+            <a:endParaRPr lang="en-US" sz="1500" dirty="0"/>
+          </a:p>
+        </p:txBody>
+      </p:sp>
+      <p:sp>
+        <p:nvSpPr>
+          <p:cNvPr id="25" name="Shape 21"/>
+          <p:cNvSpPr/>
+          <p:nvPr/>
+        </p:nvSpPr>
+        <p:spPr>
+          <a:xfrm>
+            <a:off x="548640" y="4389120"/>
+            <a:ext cx="7498080" cy="365760"/>
+          </a:xfrm>
+          <a:prstGeom prst="rect">
+            <a:avLst/>
+          </a:prstGeom>
+          <a:solidFill>
+            <a:srgbClr val="F3F1EF"/>
+          </a:solidFill>
+          <a:ln w="12700">
+            <a:solidFill>
+              <a:srgbClr val="F3F1EF"/>
+            </a:solidFill>
+            <a:prstDash val="solid"/>
+          </a:ln>
+        </p:spPr>
+      </p:sp>
+      <p:sp>
+        <p:nvSpPr>
+          <p:cNvPr id="26" name="Text 22"/>
+          <p:cNvSpPr txBox="1"/>
+          <p:nvPr/>
+        </p:nvSpPr>
+        <p:spPr>
+          <a:xfrm>
+            <a:off x="548640" y="4389120"/>
+            <a:ext cx="7498080" cy="365760"/>
+          </a:xfrm>
+          <a:prstGeom prst="rect">
+            <a:avLst/>
+          </a:prstGeom>
+          <a:noFill/>
+          <a:ln/>
+        </p:spPr>
+        <p:txBody>
+          <a:bodyPr wrap="square" lIns="0" tIns="0" rIns="0" bIns="0" rtlCol="0" anchor="ctr"/>
+          <a:lstStyle/>
+          <a:p>
+            <a:pPr algn="ctr" indent="0" marL="0">
+              <a:buNone/>
+            </a:pPr>
+            <a:r>
+              <a:rPr lang="en-US" sz="1400" b="1" dirty="0">
+                <a:solidFill>
+                  <a:srgbClr val="2B2B2B"/>
+                </a:solidFill>
+                <a:latin typeface="Calibri" pitchFamily="34" charset="0"/>
+                <a:ea typeface="Calibri" pitchFamily="34" charset="-122"/>
+                <a:cs typeface="Calibri" pitchFamily="34" charset="-120"/>
+              </a:rPr>
+              <a:t>27,482 train  ·  4,767 dev  ·  4,126 test</a:t>
+            </a:r>
+            <a:endParaRPr lang="en-US" sz="1400" dirty="0"/>
           </a:p>
         </p:txBody>
       </p:sp>
@@ -4714,8 +5240,8 @@
         </p:nvSpPr>
         <p:spPr>
           <a:xfrm>
-            <a:off x="548640" y="1371600"/>
-            <a:ext cx="1874520" cy="1737360"/>
+            <a:off x="548640" y="1280160"/>
+            <a:ext cx="1499616" cy="1463040"/>
           </a:xfrm>
           <a:prstGeom prst="rect">
             <a:avLst/>
@@ -4739,8 +5265,8 @@
         </p:nvSpPr>
         <p:spPr>
           <a:xfrm>
-            <a:off x="548640" y="1554480"/>
-            <a:ext cx="1874520" cy="822960"/>
+            <a:off x="548640" y="1371600"/>
+            <a:ext cx="1499616" cy="731520"/>
           </a:xfrm>
           <a:prstGeom prst="rect">
             <a:avLst/>
@@ -4756,7 +5282,7 @@
               <a:buNone/>
             </a:pPr>
             <a:r>
-              <a:rPr lang="en-US" sz="4000" b="1" dirty="0">
+              <a:rPr lang="en-US" sz="3400" b="1" dirty="0">
                 <a:solidFill>
                   <a:srgbClr val="A8281C"/>
                 </a:solidFill>
@@ -4766,7 +5292,7 @@
               </a:rPr>
               <a:t>2e-5</a:t>
             </a:r>
-            <a:endParaRPr lang="en-US" sz="4000" dirty="0"/>
+            <a:endParaRPr lang="en-US" sz="3400" dirty="0"/>
           </a:p>
         </p:txBody>
       </p:sp>
@@ -4778,8 +5304,8 @@
         </p:nvSpPr>
         <p:spPr>
           <a:xfrm>
-            <a:off x="548640" y="2377440"/>
-            <a:ext cx="1874520" cy="457200"/>
+            <a:off x="594360" y="2103120"/>
+            <a:ext cx="1408176" cy="502920"/>
           </a:xfrm>
           <a:prstGeom prst="rect">
             <a:avLst/>
@@ -4788,7 +5314,7 @@
           <a:ln/>
         </p:spPr>
         <p:txBody>
-          <a:bodyPr wrap="square" lIns="0" tIns="0" rIns="0" bIns="0" rtlCol="0" anchor="ctr"/>
+          <a:bodyPr wrap="square" lIns="0" tIns="0" rIns="0" bIns="0" rtlCol="0" anchor="t"/>
           <a:lstStyle/>
           <a:p>
             <a:pPr algn="ctr" indent="0" marL="0">
@@ -4817,8 +5343,8 @@
         </p:nvSpPr>
         <p:spPr>
           <a:xfrm>
-            <a:off x="2606040" y="1371600"/>
-            <a:ext cx="1874520" cy="1737360"/>
+            <a:off x="2185416" y="1280160"/>
+            <a:ext cx="1499616" cy="1463040"/>
           </a:xfrm>
           <a:prstGeom prst="rect">
             <a:avLst/>
@@ -4842,8 +5368,8 @@
         </p:nvSpPr>
         <p:spPr>
           <a:xfrm>
-            <a:off x="2606040" y="1554480"/>
-            <a:ext cx="1874520" cy="822960"/>
+            <a:off x="2185416" y="1371600"/>
+            <a:ext cx="1499616" cy="731520"/>
           </a:xfrm>
           <a:prstGeom prst="rect">
             <a:avLst/>
@@ -4859,7 +5385,7 @@
               <a:buNone/>
             </a:pPr>
             <a:r>
-              <a:rPr lang="en-US" sz="4000" b="1" dirty="0">
+              <a:rPr lang="en-US" sz="3400" b="1" dirty="0">
                 <a:solidFill>
                   <a:srgbClr val="A8281C"/>
                 </a:solidFill>
@@ -4869,7 +5395,7 @@
               </a:rPr>
               <a:t>8</a:t>
             </a:r>
-            <a:endParaRPr lang="en-US" sz="4000" dirty="0"/>
+            <a:endParaRPr lang="en-US" sz="3400" dirty="0"/>
           </a:p>
         </p:txBody>
       </p:sp>
@@ -4881,8 +5407,8 @@
         </p:nvSpPr>
         <p:spPr>
           <a:xfrm>
-            <a:off x="2606040" y="2377440"/>
-            <a:ext cx="1874520" cy="457200"/>
+            <a:off x="2231136" y="2103120"/>
+            <a:ext cx="1408176" cy="502920"/>
           </a:xfrm>
           <a:prstGeom prst="rect">
             <a:avLst/>
@@ -4891,7 +5417,7 @@
           <a:ln/>
         </p:spPr>
         <p:txBody>
-          <a:bodyPr wrap="square" lIns="0" tIns="0" rIns="0" bIns="0" rtlCol="0" anchor="ctr"/>
+          <a:bodyPr wrap="square" lIns="0" tIns="0" rIns="0" bIns="0" rtlCol="0" anchor="t"/>
           <a:lstStyle/>
           <a:p>
             <a:pPr algn="ctr" indent="0" marL="0">
@@ -4920,8 +5446,8 @@
         </p:nvSpPr>
         <p:spPr>
           <a:xfrm>
-            <a:off x="4663440" y="1371600"/>
-            <a:ext cx="1874520" cy="1737360"/>
+            <a:off x="3822192" y="1280160"/>
+            <a:ext cx="1499616" cy="1463040"/>
           </a:xfrm>
           <a:prstGeom prst="rect">
             <a:avLst/>
@@ -4945,8 +5471,8 @@
         </p:nvSpPr>
         <p:spPr>
           <a:xfrm>
-            <a:off x="4663440" y="1554480"/>
-            <a:ext cx="1874520" cy="822960"/>
+            <a:off x="3822192" y="1371600"/>
+            <a:ext cx="1499616" cy="731520"/>
           </a:xfrm>
           <a:prstGeom prst="rect">
             <a:avLst/>
@@ -4962,7 +5488,7 @@
               <a:buNone/>
             </a:pPr>
             <a:r>
-              <a:rPr lang="en-US" sz="4000" b="1" dirty="0">
+              <a:rPr lang="en-US" sz="3400" b="1" dirty="0">
                 <a:solidFill>
                   <a:srgbClr val="A8281C"/>
                 </a:solidFill>
@@ -4972,7 +5498,7 @@
               </a:rPr>
               <a:t>3</a:t>
             </a:r>
-            <a:endParaRPr lang="en-US" sz="4000" dirty="0"/>
+            <a:endParaRPr lang="en-US" sz="3400" dirty="0"/>
           </a:p>
         </p:txBody>
       </p:sp>
@@ -4984,8 +5510,8 @@
         </p:nvSpPr>
         <p:spPr>
           <a:xfrm>
-            <a:off x="4663440" y="2377440"/>
-            <a:ext cx="1874520" cy="457200"/>
+            <a:off x="3867912" y="2103120"/>
+            <a:ext cx="1408176" cy="502920"/>
           </a:xfrm>
           <a:prstGeom prst="rect">
             <a:avLst/>
@@ -4994,7 +5520,7 @@
           <a:ln/>
         </p:spPr>
         <p:txBody>
-          <a:bodyPr wrap="square" lIns="0" tIns="0" rIns="0" bIns="0" rtlCol="0" anchor="ctr"/>
+          <a:bodyPr wrap="square" lIns="0" tIns="0" rIns="0" bIns="0" rtlCol="0" anchor="t"/>
           <a:lstStyle/>
           <a:p>
             <a:pPr algn="ctr" indent="0" marL="0">
@@ -5023,8 +5549,8 @@
         </p:nvSpPr>
         <p:spPr>
           <a:xfrm>
-            <a:off x="6720840" y="1371600"/>
-            <a:ext cx="1874520" cy="1737360"/>
+            <a:off x="5458968" y="1280160"/>
+            <a:ext cx="1499616" cy="1463040"/>
           </a:xfrm>
           <a:prstGeom prst="rect">
             <a:avLst/>
@@ -5048,8 +5574,8 @@
         </p:nvSpPr>
         <p:spPr>
           <a:xfrm>
-            <a:off x="6720840" y="1554480"/>
-            <a:ext cx="1874520" cy="822960"/>
+            <a:off x="5458968" y="1371600"/>
+            <a:ext cx="1499616" cy="731520"/>
           </a:xfrm>
           <a:prstGeom prst="rect">
             <a:avLst/>
@@ -5065,7 +5591,7 @@
               <a:buNone/>
             </a:pPr>
             <a:r>
-              <a:rPr lang="en-US" sz="4000" b="1" dirty="0">
+              <a:rPr lang="en-US" sz="3400" b="1" dirty="0">
                 <a:solidFill>
                   <a:srgbClr val="A8281C"/>
                 </a:solidFill>
@@ -5075,7 +5601,7 @@
               </a:rPr>
               <a:t>256</a:t>
             </a:r>
-            <a:endParaRPr lang="en-US" sz="4000" dirty="0"/>
+            <a:endParaRPr lang="en-US" sz="3400" dirty="0"/>
           </a:p>
         </p:txBody>
       </p:sp>
@@ -5087,8 +5613,8 @@
         </p:nvSpPr>
         <p:spPr>
           <a:xfrm>
-            <a:off x="6720840" y="2377440"/>
-            <a:ext cx="1874520" cy="457200"/>
+            <a:off x="5504688" y="2103120"/>
+            <a:ext cx="1408176" cy="502920"/>
           </a:xfrm>
           <a:prstGeom prst="rect">
             <a:avLst/>
@@ -5097,7 +5623,7 @@
           <a:ln/>
         </p:spPr>
         <p:txBody>
-          <a:bodyPr wrap="square" lIns="0" tIns="0" rIns="0" bIns="0" rtlCol="0" anchor="ctr"/>
+          <a:bodyPr wrap="square" lIns="0" tIns="0" rIns="0" bIns="0" rtlCol="0" anchor="t"/>
           <a:lstStyle/>
           <a:p>
             <a:pPr algn="ctr" indent="0" marL="0">
@@ -5112,7 +5638,7 @@
                 <a:ea typeface="Calibri" pitchFamily="34" charset="-122"/>
                 <a:cs typeface="Calibri" pitchFamily="34" charset="-120"/>
               </a:rPr>
-              <a:t>max sequence length</a:t>
+              <a:t>max length</a:t>
             </a:r>
             <a:endParaRPr lang="en-US" sz="1400" dirty="0"/>
           </a:p>
@@ -5120,14 +5646,117 @@
       </p:sp>
       <p:sp>
         <p:nvSpPr>
-          <p:cNvPr id="16" name="Text 13"/>
+          <p:cNvPr id="16" name="Shape 13"/>
+          <p:cNvSpPr/>
+          <p:nvPr/>
+        </p:nvSpPr>
+        <p:spPr>
+          <a:xfrm>
+            <a:off x="7095744" y="1280160"/>
+            <a:ext cx="1499616" cy="1463040"/>
+          </a:xfrm>
+          <a:prstGeom prst="rect">
+            <a:avLst/>
+          </a:prstGeom>
+          <a:solidFill>
+            <a:srgbClr val="F3F1EF"/>
+          </a:solidFill>
+          <a:ln w="12700">
+            <a:solidFill>
+              <a:srgbClr val="F3F1EF"/>
+            </a:solidFill>
+            <a:prstDash val="solid"/>
+          </a:ln>
+        </p:spPr>
+      </p:sp>
+      <p:sp>
+        <p:nvSpPr>
+          <p:cNvPr id="17" name="Text 14"/>
           <p:cNvSpPr txBox="1"/>
           <p:nvPr/>
         </p:nvSpPr>
         <p:spPr>
           <a:xfrm>
-            <a:off x="548640" y="3429000"/>
-            <a:ext cx="8046720" cy="1097280"/>
+            <a:off x="7095744" y="1371600"/>
+            <a:ext cx="1499616" cy="731520"/>
+          </a:xfrm>
+          <a:prstGeom prst="rect">
+            <a:avLst/>
+          </a:prstGeom>
+          <a:noFill/>
+          <a:ln/>
+        </p:spPr>
+        <p:txBody>
+          <a:bodyPr wrap="square" lIns="0" tIns="0" rIns="0" bIns="0" rtlCol="0" anchor="ctr"/>
+          <a:lstStyle/>
+          <a:p>
+            <a:pPr algn="ctr" indent="0" marL="0">
+              <a:buNone/>
+            </a:pPr>
+            <a:r>
+              <a:rPr lang="en-US" sz="3400" b="1" dirty="0">
+                <a:solidFill>
+                  <a:srgbClr val="A8281C"/>
+                </a:solidFill>
+                <a:latin typeface="Cambria" pitchFamily="34" charset="0"/>
+                <a:ea typeface="Cambria" pitchFamily="34" charset="-122"/>
+                <a:cs typeface="Cambria" pitchFamily="34" charset="-120"/>
+              </a:rPr>
+              <a:t>42</a:t>
+            </a:r>
+            <a:endParaRPr lang="en-US" sz="3400" dirty="0"/>
+          </a:p>
+        </p:txBody>
+      </p:sp>
+      <p:sp>
+        <p:nvSpPr>
+          <p:cNvPr id="18" name="Text 15"/>
+          <p:cNvSpPr txBox="1"/>
+          <p:nvPr/>
+        </p:nvSpPr>
+        <p:spPr>
+          <a:xfrm>
+            <a:off x="7141464" y="2103120"/>
+            <a:ext cx="1408176" cy="502920"/>
+          </a:xfrm>
+          <a:prstGeom prst="rect">
+            <a:avLst/>
+          </a:prstGeom>
+          <a:noFill/>
+          <a:ln/>
+        </p:spPr>
+        <p:txBody>
+          <a:bodyPr wrap="square" lIns="0" tIns="0" rIns="0" bIns="0" rtlCol="0" anchor="t"/>
+          <a:lstStyle/>
+          <a:p>
+            <a:pPr algn="ctr" indent="0" marL="0">
+              <a:buNone/>
+            </a:pPr>
+            <a:r>
+              <a:rPr lang="en-US" sz="1400" dirty="0">
+                <a:solidFill>
+                  <a:srgbClr val="2B2B2B"/>
+                </a:solidFill>
+                <a:latin typeface="Calibri" pitchFamily="34" charset="0"/>
+                <a:ea typeface="Calibri" pitchFamily="34" charset="-122"/>
+                <a:cs typeface="Calibri" pitchFamily="34" charset="-120"/>
+              </a:rPr>
+              <a:t>random seed</a:t>
+            </a:r>
+            <a:endParaRPr lang="en-US" sz="1400" dirty="0"/>
+          </a:p>
+        </p:txBody>
+      </p:sp>
+      <p:sp>
+        <p:nvSpPr>
+          <p:cNvPr id="19" name="Text 16"/>
+          <p:cNvSpPr txBox="1"/>
+          <p:nvPr/>
+        </p:nvSpPr>
+        <p:spPr>
+          <a:xfrm>
+            <a:off x="548640" y="3017520"/>
+            <a:ext cx="8046720" cy="1600200"/>
           </a:xfrm>
           <a:prstGeom prst="rect">
             <a:avLst/>
@@ -5155,7 +5784,7 @@
                 <a:ea typeface="Calibri" pitchFamily="34" charset="-122"/>
                 <a:cs typeface="Calibri" pitchFamily="34" charset="-120"/>
               </a:rPr>
-              <a:t>Hugging Face Trainer, AdamW, seed 42</a:t>
+              <a:t>Best checkpoint chosen on the dev set</a:t>
             </a:r>
             <a:endParaRPr lang="en-US" sz="1600" dirty="0"/>
           </a:p>
@@ -5176,7 +5805,7 @@
                 <a:ea typeface="Calibri" pitchFamily="34" charset="-122"/>
                 <a:cs typeface="Calibri" pitchFamily="34" charset="-120"/>
               </a:rPr>
-              <a:t>Best checkpoint chosen on dev F1</a:t>
+              <a:t>Evaluated with seqeval: entity-level precision, recall, F1</a:t>
             </a:r>
             <a:endParaRPr lang="en-US" sz="1600" dirty="0"/>
           </a:p>
@@ -5197,7 +5826,28 @@
                 <a:ea typeface="Calibri" pitchFamily="34" charset="-122"/>
                 <a:cs typeface="Calibri" pitchFamily="34" charset="-120"/>
               </a:rPr>
-              <a:t>Evaluated with seqeval (entity-level P / R / F1)</a:t>
+              <a:t>An entity is correct only if boundaries and type are both right</a:t>
+            </a:r>
+            <a:endParaRPr lang="en-US" sz="1600" dirty="0"/>
+          </a:p>
+          <a:p>
+            <a:pPr marL="342900" indent="-342900">
+              <a:spcAft>
+                <a:spcPts val="600"/>
+              </a:spcAft>
+              <a:buSzPct val="100000"/>
+              <a:buChar char="•"/>
+            </a:pPr>
+            <a:r>
+              <a:rPr lang="en-US" sz="1600" dirty="0">
+                <a:solidFill>
+                  <a:srgbClr val="2B2B2B"/>
+                </a:solidFill>
+                <a:latin typeface="Calibri" pitchFamily="34" charset="0"/>
+                <a:ea typeface="Calibri" pitchFamily="34" charset="-122"/>
+                <a:cs typeface="Calibri" pitchFamily="34" charset="-120"/>
+              </a:rPr>
+              <a:t>F1 as main metric: most tokens are "O", so accuracy misleads</a:t>
             </a:r>
             <a:endParaRPr lang="en-US" sz="1600" dirty="0"/>
           </a:p>
@@ -5531,8 +6181,8 @@
         </p:nvSpPr>
         <p:spPr>
           <a:xfrm>
-            <a:off x="548640" y="3931920"/>
-            <a:ext cx="8046720" cy="457200"/>
+            <a:off x="548640" y="3794760"/>
+            <a:ext cx="8046720" cy="365760"/>
           </a:xfrm>
           <a:prstGeom prst="rect">
             <a:avLst/>
@@ -5559,6 +6209,45 @@
               <a:t>Gap of ≈ 2 F1 points, consistent in precision and recall</a:t>
             </a:r>
             <a:endParaRPr lang="en-US" sz="1800" dirty="0"/>
+          </a:p>
+        </p:txBody>
+      </p:sp>
+      <p:sp>
+        <p:nvSpPr>
+          <p:cNvPr id="11" name="Text 8"/>
+          <p:cNvSpPr txBox="1"/>
+          <p:nvPr/>
+        </p:nvSpPr>
+        <p:spPr>
+          <a:xfrm>
+            <a:off x="548640" y="4206240"/>
+            <a:ext cx="8046720" cy="365760"/>
+          </a:xfrm>
+          <a:prstGeom prst="rect">
+            <a:avLst/>
+          </a:prstGeom>
+          <a:noFill/>
+          <a:ln/>
+        </p:spPr>
+        <p:txBody>
+          <a:bodyPr wrap="square" lIns="0" tIns="0" rIns="0" bIns="0" rtlCol="0" anchor="ctr"/>
+          <a:lstStyle/>
+          <a:p>
+            <a:pPr algn="ctr" indent="0" marL="0">
+              <a:buNone/>
+            </a:pPr>
+            <a:r>
+              <a:rPr lang="en-US" sz="1500" dirty="0">
+                <a:solidFill>
+                  <a:srgbClr val="6B6B6B"/>
+                </a:solidFill>
+                <a:latin typeface="Calibri" pitchFamily="34" charset="0"/>
+                <a:ea typeface="Calibri" pitchFamily="34" charset="-122"/>
+                <a:cs typeface="Calibri" pitchFamily="34" charset="-120"/>
+              </a:rPr>
+              <a:t>For reference: best NERMuD 2023 systems score around 0.90 F1</a:t>
+            </a:r>
+            <a:endParaRPr lang="en-US" sz="1500" dirty="0"/>
           </a:p>
         </p:txBody>
       </p:sp>
@@ -5994,7 +6683,7 @@
                 <a:ea typeface="Cambria" pitchFamily="34" charset="-122"/>
                 <a:cs typeface="Cambria" pitchFamily="34" charset="-120"/>
               </a:rPr>
-              <a:t>What we found</a:t>
+              <a:t>The answer: yes, but…</a:t>
             </a:r>
             <a:endParaRPr lang="en-US" sz="2000" dirty="0"/>
           </a:p>
@@ -6037,7 +6726,7 @@
                 <a:ea typeface="Calibri" pitchFamily="34" charset="-122"/>
                 <a:cs typeface="Calibri" pitchFamily="34" charset="-120"/>
               </a:rPr>
-              <a:t>Italian-specific model wins overall</a:t>
+              <a:t>UmBERTo is better overall</a:t>
             </a:r>
             <a:endParaRPr lang="en-US" sz="1600" dirty="0"/>
           </a:p>
@@ -6058,7 +6747,7 @@
                 <a:ea typeface="Calibri" pitchFamily="34" charset="-122"/>
                 <a:cs typeface="Calibri" pitchFamily="34" charset="-120"/>
               </a:rPr>
-              <a:t>Advantage holds for all entity types</a:t>
+              <a:t>XLM-R is better on fiction</a:t>
             </a:r>
             <a:endParaRPr lang="en-US" sz="1600" dirty="0"/>
           </a:p>
@@ -6079,7 +6768,7 @@
                 <a:ea typeface="Calibri" pitchFamily="34" charset="-122"/>
                 <a:cs typeface="Calibri" pitchFamily="34" charset="-120"/>
               </a:rPr>
-              <a:t>Fiction is the exception</a:t>
+              <a:t>Gap is not uniform across domains</a:t>
             </a:r>
             <a:endParaRPr lang="en-US" sz="1600" dirty="0"/>
           </a:p>
@@ -6143,7 +6832,7 @@
                 <a:ea typeface="Cambria" pitchFamily="34" charset="-122"/>
                 <a:cs typeface="Cambria" pitchFamily="34" charset="-120"/>
               </a:rPr>
-              <a:t>Caveats &amp; next steps</a:t>
+              <a:t>Limitations &amp; next steps</a:t>
             </a:r>
             <a:endParaRPr lang="en-US" sz="2000" dirty="0"/>
           </a:p>
